--- a/figures/figures.pptx
+++ b/figures/figures.pptx
@@ -9,9 +9,8 @@
     <p:sldId id="264" r:id="rId3"/>
     <p:sldId id="265" r:id="rId4"/>
     <p:sldId id="266" r:id="rId5"/>
-    <p:sldId id="267" r:id="rId6"/>
-    <p:sldId id="269" r:id="rId7"/>
-    <p:sldId id="268" r:id="rId8"/>
+    <p:sldId id="269" r:id="rId6"/>
+    <p:sldId id="268" r:id="rId7"/>
   </p:sldIdLst>
   <p:sldSz cx="12192000" cy="6858000"/>
   <p:notesSz cx="6858000" cy="9144000"/>
@@ -265,7 +264,7 @@
           <a:p>
             <a:fld id="{75A9CF98-CC55-774D-9AE2-4D7D2CE05F38}" type="datetimeFigureOut">
               <a:rPr lang="en-US" smtClean="0"/>
-              <a:t>10/22/25</a:t>
+              <a:t>10/23/25</a:t>
             </a:fld>
             <a:endParaRPr lang="en-US"/>
           </a:p>
@@ -463,7 +462,7 @@
           <a:p>
             <a:fld id="{75A9CF98-CC55-774D-9AE2-4D7D2CE05F38}" type="datetimeFigureOut">
               <a:rPr lang="en-US" smtClean="0"/>
-              <a:t>10/22/25</a:t>
+              <a:t>10/23/25</a:t>
             </a:fld>
             <a:endParaRPr lang="en-US"/>
           </a:p>
@@ -671,7 +670,7 @@
           <a:p>
             <a:fld id="{75A9CF98-CC55-774D-9AE2-4D7D2CE05F38}" type="datetimeFigureOut">
               <a:rPr lang="en-US" smtClean="0"/>
-              <a:t>10/22/25</a:t>
+              <a:t>10/23/25</a:t>
             </a:fld>
             <a:endParaRPr lang="en-US"/>
           </a:p>
@@ -869,7 +868,7 @@
           <a:p>
             <a:fld id="{75A9CF98-CC55-774D-9AE2-4D7D2CE05F38}" type="datetimeFigureOut">
               <a:rPr lang="en-US" smtClean="0"/>
-              <a:t>10/22/25</a:t>
+              <a:t>10/23/25</a:t>
             </a:fld>
             <a:endParaRPr lang="en-US"/>
           </a:p>
@@ -1144,7 +1143,7 @@
           <a:p>
             <a:fld id="{75A9CF98-CC55-774D-9AE2-4D7D2CE05F38}" type="datetimeFigureOut">
               <a:rPr lang="en-US" smtClean="0"/>
-              <a:t>10/22/25</a:t>
+              <a:t>10/23/25</a:t>
             </a:fld>
             <a:endParaRPr lang="en-US"/>
           </a:p>
@@ -1409,7 +1408,7 @@
           <a:p>
             <a:fld id="{75A9CF98-CC55-774D-9AE2-4D7D2CE05F38}" type="datetimeFigureOut">
               <a:rPr lang="en-US" smtClean="0"/>
-              <a:t>10/22/25</a:t>
+              <a:t>10/23/25</a:t>
             </a:fld>
             <a:endParaRPr lang="en-US"/>
           </a:p>
@@ -1821,7 +1820,7 @@
           <a:p>
             <a:fld id="{75A9CF98-CC55-774D-9AE2-4D7D2CE05F38}" type="datetimeFigureOut">
               <a:rPr lang="en-US" smtClean="0"/>
-              <a:t>10/22/25</a:t>
+              <a:t>10/23/25</a:t>
             </a:fld>
             <a:endParaRPr lang="en-US"/>
           </a:p>
@@ -1962,7 +1961,7 @@
           <a:p>
             <a:fld id="{75A9CF98-CC55-774D-9AE2-4D7D2CE05F38}" type="datetimeFigureOut">
               <a:rPr lang="en-US" smtClean="0"/>
-              <a:t>10/22/25</a:t>
+              <a:t>10/23/25</a:t>
             </a:fld>
             <a:endParaRPr lang="en-US"/>
           </a:p>
@@ -2075,7 +2074,7 @@
           <a:p>
             <a:fld id="{75A9CF98-CC55-774D-9AE2-4D7D2CE05F38}" type="datetimeFigureOut">
               <a:rPr lang="en-US" smtClean="0"/>
-              <a:t>10/22/25</a:t>
+              <a:t>10/23/25</a:t>
             </a:fld>
             <a:endParaRPr lang="en-US"/>
           </a:p>
@@ -2386,7 +2385,7 @@
           <a:p>
             <a:fld id="{75A9CF98-CC55-774D-9AE2-4D7D2CE05F38}" type="datetimeFigureOut">
               <a:rPr lang="en-US" smtClean="0"/>
-              <a:t>10/22/25</a:t>
+              <a:t>10/23/25</a:t>
             </a:fld>
             <a:endParaRPr lang="en-US"/>
           </a:p>
@@ -2674,7 +2673,7 @@
           <a:p>
             <a:fld id="{75A9CF98-CC55-774D-9AE2-4D7D2CE05F38}" type="datetimeFigureOut">
               <a:rPr lang="en-US" smtClean="0"/>
-              <a:t>10/22/25</a:t>
+              <a:t>10/23/25</a:t>
             </a:fld>
             <a:endParaRPr lang="en-US"/>
           </a:p>
@@ -2915,7 +2914,7 @@
           <a:p>
             <a:fld id="{75A9CF98-CC55-774D-9AE2-4D7D2CE05F38}" type="datetimeFigureOut">
               <a:rPr lang="en-US" smtClean="0"/>
-              <a:t>10/22/25</a:t>
+              <a:t>10/23/25</a:t>
             </a:fld>
             <a:endParaRPr lang="en-US"/>
           </a:p>
@@ -3390,23 +3389,8 @@
                       </a:solidFill>
                       <a:latin typeface="Aptos" panose="020B0004020202020204" pitchFamily="34" charset="0"/>
                     </a:rPr>
-                    <a:t>1. </a:t>
+                    <a:t>1. SINDy</a:t>
                   </a:r>
-                  <a:r>
-                    <a:rPr lang="en-US" b="1" dirty="0" err="1">
-                      <a:solidFill>
-                        <a:schemeClr val="tx1"/>
-                      </a:solidFill>
-                      <a:latin typeface="Aptos" panose="020B0004020202020204" pitchFamily="34" charset="0"/>
-                    </a:rPr>
-                    <a:t>SINDy</a:t>
-                  </a:r>
-                  <a:endParaRPr lang="en-US" b="1" dirty="0">
-                    <a:solidFill>
-                      <a:schemeClr val="tx1"/>
-                    </a:solidFill>
-                    <a:latin typeface="Aptos" panose="020B0004020202020204" pitchFamily="34" charset="0"/>
-                  </a:endParaRPr>
                 </a:p>
                 <a:p>
                   <a:pPr algn="ctr"/>
@@ -3614,7 +3598,7 @@
                       </a:solidFill>
                       <a:latin typeface="Aptos" panose="020B0004020202020204" pitchFamily="34" charset="0"/>
                     </a:rPr>
-                    <a:t>2. NN-driven</a:t>
+                    <a:t>2. NN-derivative</a:t>
                   </a:r>
                 </a:p>
                 <a:p>
@@ -8031,10 +8015,10 @@
       </p:pic>
       <p:pic>
         <p:nvPicPr>
-          <p:cNvPr id="15" name="Picture 14">
-            <a:extLst>
-              <a:ext uri="{FF2B5EF4-FFF2-40B4-BE49-F238E27FC236}">
-                <a16:creationId xmlns:a16="http://schemas.microsoft.com/office/drawing/2014/main" id="{4422557D-440D-7C4A-127F-99CF8FA8CB29}"/>
+          <p:cNvPr id="4" name="Picture 3">
+            <a:extLst>
+              <a:ext uri="{FF2B5EF4-FFF2-40B4-BE49-F238E27FC236}">
+                <a16:creationId xmlns:a16="http://schemas.microsoft.com/office/drawing/2014/main" id="{B2E06A5C-8DD2-9C99-A6C1-E3C1B6BC8703}"/>
               </a:ext>
             </a:extLst>
           </p:cNvPr>
@@ -8045,6 +8029,37 @@
         </p:nvPicPr>
         <p:blipFill>
           <a:blip r:embed="rId3"/>
+          <a:srcRect r="18824"/>
+          <a:stretch>
+            <a:fillRect/>
+          </a:stretch>
+        </p:blipFill>
+        <p:spPr>
+          <a:xfrm>
+            <a:off x="-994" y="1983522"/>
+            <a:ext cx="3746004" cy="3463508"/>
+          </a:xfrm>
+          <a:prstGeom prst="rect">
+            <a:avLst/>
+          </a:prstGeom>
+        </p:spPr>
+      </p:pic>
+      <p:pic>
+        <p:nvPicPr>
+          <p:cNvPr id="15" name="Picture 14">
+            <a:extLst>
+              <a:ext uri="{FF2B5EF4-FFF2-40B4-BE49-F238E27FC236}">
+                <a16:creationId xmlns:a16="http://schemas.microsoft.com/office/drawing/2014/main" id="{4422557D-440D-7C4A-127F-99CF8FA8CB29}"/>
+              </a:ext>
+            </a:extLst>
+          </p:cNvPr>
+          <p:cNvPicPr>
+            <a:picLocks noChangeAspect="1"/>
+          </p:cNvPicPr>
+          <p:nvPr/>
+        </p:nvPicPr>
+        <p:blipFill>
+          <a:blip r:embed="rId4"/>
           <a:srcRect l="2193" r="24776"/>
           <a:stretch>
             <a:fillRect/>
@@ -8102,23 +8117,8 @@
                 </a:solidFill>
                 <a:latin typeface="Aptos" panose="020B0004020202020204" pitchFamily="34" charset="0"/>
               </a:rPr>
-              <a:t> </a:t>
-            </a:r>
-            <a:r>
-              <a:rPr lang="en-US" b="1" dirty="0" err="1">
-                <a:solidFill>
-                  <a:schemeClr val="tx1"/>
-                </a:solidFill>
-                <a:latin typeface="Aptos" panose="020B0004020202020204" pitchFamily="34" charset="0"/>
-              </a:rPr>
-              <a:t>SINDy</a:t>
-            </a:r>
-            <a:endParaRPr lang="en-US" b="1" dirty="0">
-              <a:solidFill>
-                <a:schemeClr val="tx1"/>
-              </a:solidFill>
-              <a:latin typeface="Aptos" panose="020B0004020202020204" pitchFamily="34" charset="0"/>
-            </a:endParaRPr>
+              <a:t> SINDy</a:t>
+            </a:r>
           </a:p>
         </p:txBody>
       </p:sp>
@@ -8136,7 +8136,7 @@
         </p:nvSpPr>
         <p:spPr>
           <a:xfrm>
-            <a:off x="3548031" y="1968080"/>
+            <a:off x="3717303" y="1944585"/>
             <a:ext cx="2259479" cy="369332"/>
           </a:xfrm>
           <a:prstGeom prst="rect">
@@ -8164,7 +8164,7 @@
                 </a:solidFill>
                 <a:latin typeface="Aptos" panose="020B0004020202020204" pitchFamily="34" charset="0"/>
               </a:rPr>
-              <a:t> NN-driven</a:t>
+              <a:t> NN-derivative</a:t>
             </a:r>
           </a:p>
         </p:txBody>
@@ -8216,37 +8216,6 @@
           </a:p>
         </p:txBody>
       </p:sp>
-      <p:pic>
-        <p:nvPicPr>
-          <p:cNvPr id="6" name="Picture 5">
-            <a:extLst>
-              <a:ext uri="{FF2B5EF4-FFF2-40B4-BE49-F238E27FC236}">
-                <a16:creationId xmlns:a16="http://schemas.microsoft.com/office/drawing/2014/main" id="{327ABC7B-0D8F-75BD-855A-D6C65BF61F9A}"/>
-              </a:ext>
-            </a:extLst>
-          </p:cNvPr>
-          <p:cNvPicPr>
-            <a:picLocks noChangeAspect="1"/>
-          </p:cNvPicPr>
-          <p:nvPr/>
-        </p:nvPicPr>
-        <p:blipFill>
-          <a:blip r:embed="rId4"/>
-          <a:srcRect l="7939" t="9471" r="18510" b="3182"/>
-          <a:stretch>
-            <a:fillRect/>
-          </a:stretch>
-        </p:blipFill>
-        <p:spPr>
-          <a:xfrm>
-            <a:off x="199391" y="2325122"/>
-            <a:ext cx="3550528" cy="3164727"/>
-          </a:xfrm>
-          <a:prstGeom prst="rect">
-            <a:avLst/>
-          </a:prstGeom>
-        </p:spPr>
-      </p:pic>
     </p:spTree>
     <p:extLst>
       <p:ext uri="{BB962C8B-B14F-4D97-AF65-F5344CB8AC3E}">
@@ -8277,6 +8246,36 @@
           <a:chExt cx="0" cy="0"/>
         </a:xfrm>
       </p:grpSpPr>
+      <p:pic>
+        <p:nvPicPr>
+          <p:cNvPr id="7" name="Picture 6">
+            <a:extLst>
+              <a:ext uri="{FF2B5EF4-FFF2-40B4-BE49-F238E27FC236}">
+                <a16:creationId xmlns:a16="http://schemas.microsoft.com/office/drawing/2014/main" id="{6CBA3C59-9D86-68AE-5F26-96C922E82678}"/>
+              </a:ext>
+            </a:extLst>
+          </p:cNvPr>
+          <p:cNvPicPr>
+            <a:picLocks noChangeAspect="1"/>
+          </p:cNvPicPr>
+          <p:nvPr/>
+        </p:nvPicPr>
+        <p:blipFill>
+          <a:blip r:embed="rId2"/>
+          <a:stretch>
+            <a:fillRect/>
+          </a:stretch>
+        </p:blipFill>
+        <p:spPr>
+          <a:xfrm>
+            <a:off x="1472618" y="352308"/>
+            <a:ext cx="6326505" cy="2811780"/>
+          </a:xfrm>
+          <a:prstGeom prst="rect">
+            <a:avLst/>
+          </a:prstGeom>
+        </p:spPr>
+      </p:pic>
       <p:sp>
         <p:nvSpPr>
           <p:cNvPr id="10" name="TextBox 9">
@@ -8320,36 +8319,6 @@
           </a:p>
         </p:txBody>
       </p:sp>
-      <p:pic>
-        <p:nvPicPr>
-          <p:cNvPr id="18" name="Picture 17">
-            <a:extLst>
-              <a:ext uri="{FF2B5EF4-FFF2-40B4-BE49-F238E27FC236}">
-                <a16:creationId xmlns:a16="http://schemas.microsoft.com/office/drawing/2014/main" id="{E94B7A5B-C913-F31C-05F5-7BF25A18110F}"/>
-              </a:ext>
-            </a:extLst>
-          </p:cNvPr>
-          <p:cNvPicPr>
-            <a:picLocks noChangeAspect="1"/>
-          </p:cNvPicPr>
-          <p:nvPr/>
-        </p:nvPicPr>
-        <p:blipFill>
-          <a:blip r:embed="rId2"/>
-          <a:stretch>
-            <a:fillRect/>
-          </a:stretch>
-        </p:blipFill>
-        <p:spPr>
-          <a:xfrm>
-            <a:off x="1456843" y="265668"/>
-            <a:ext cx="6457951" cy="2870200"/>
-          </a:xfrm>
-          <a:prstGeom prst="rect">
-            <a:avLst/>
-          </a:prstGeom>
-        </p:spPr>
-      </p:pic>
       <p:pic>
         <p:nvPicPr>
           <p:cNvPr id="36" name="Picture 35">
@@ -8449,7 +8418,7 @@
               <a:t>b) </a:t>
             </a:r>
             <a:r>
-              <a:rPr lang="en-US" sz="1200" dirty="0" err="1"/>
+              <a:rPr lang="en-US" sz="1200" dirty="0"/>
               <a:t>SINDy</a:t>
             </a:r>
             <a:endParaRPr lang="en-US" sz="1200" b="1" dirty="0"/>
@@ -8780,8 +8749,8 @@
         </p:nvSpPr>
         <p:spPr>
           <a:xfrm>
-            <a:off x="1456841" y="4389363"/>
-            <a:ext cx="1240060" cy="276999"/>
+            <a:off x="1456840" y="4389363"/>
+            <a:ext cx="1363067" cy="276999"/>
           </a:xfrm>
           <a:prstGeom prst="rect">
             <a:avLst/>
@@ -8800,7 +8769,7 @@
             </a:r>
             <a:r>
               <a:rPr lang="en-US" sz="1200" dirty="0"/>
-              <a:t>NN-driven*</a:t>
+              <a:t>NN-derivative*</a:t>
             </a:r>
             <a:endParaRPr lang="en-US" sz="1200" b="1" dirty="0"/>
           </a:p>
@@ -8978,246 +8947,6 @@
   <p:cSld>
     <p:spTree>
       <p:nvGrpSpPr>
-        <p:cNvPr id="1" name=""/>
-        <p:cNvGrpSpPr/>
-        <p:nvPr/>
-      </p:nvGrpSpPr>
-      <p:grpSpPr>
-        <a:xfrm>
-          <a:off x="0" y="0"/>
-          <a:ext cx="0" cy="0"/>
-          <a:chOff x="0" y="0"/>
-          <a:chExt cx="0" cy="0"/>
-        </a:xfrm>
-      </p:grpSpPr>
-      <p:pic>
-        <p:nvPicPr>
-          <p:cNvPr id="5" name="Picture 4">
-            <a:extLst>
-              <a:ext uri="{FF2B5EF4-FFF2-40B4-BE49-F238E27FC236}">
-                <a16:creationId xmlns:a16="http://schemas.microsoft.com/office/drawing/2014/main" id="{EF9474AD-595A-EBD1-4D17-4E6912AEB38C}"/>
-              </a:ext>
-            </a:extLst>
-          </p:cNvPr>
-          <p:cNvPicPr>
-            <a:picLocks noChangeAspect="1"/>
-          </p:cNvPicPr>
-          <p:nvPr/>
-        </p:nvPicPr>
-        <p:blipFill>
-          <a:blip r:embed="rId2"/>
-          <a:stretch>
-            <a:fillRect/>
-          </a:stretch>
-        </p:blipFill>
-        <p:spPr>
-          <a:xfrm>
-            <a:off x="2545492" y="408830"/>
-            <a:ext cx="4085967" cy="2042984"/>
-          </a:xfrm>
-          <a:prstGeom prst="rect">
-            <a:avLst/>
-          </a:prstGeom>
-        </p:spPr>
-      </p:pic>
-      <p:sp>
-        <p:nvSpPr>
-          <p:cNvPr id="6" name="TextBox 5">
-            <a:extLst>
-              <a:ext uri="{FF2B5EF4-FFF2-40B4-BE49-F238E27FC236}">
-                <a16:creationId xmlns:a16="http://schemas.microsoft.com/office/drawing/2014/main" id="{3943EFA6-50E9-CEBE-D1B3-97626D1A6C08}"/>
-              </a:ext>
-            </a:extLst>
-          </p:cNvPr>
-          <p:cNvSpPr txBox="1"/>
-          <p:nvPr/>
-        </p:nvSpPr>
-        <p:spPr>
-          <a:xfrm>
-            <a:off x="2534657" y="290440"/>
-            <a:ext cx="1013798" cy="261610"/>
-          </a:xfrm>
-          <a:prstGeom prst="rect">
-            <a:avLst/>
-          </a:prstGeom>
-          <a:noFill/>
-        </p:spPr>
-        <p:txBody>
-          <a:bodyPr wrap="square" rtlCol="0">
-            <a:spAutoFit/>
-          </a:bodyPr>
-          <a:lstStyle/>
-          <a:p>
-            <a:r>
-              <a:rPr lang="en-US" sz="1100" b="1" dirty="0"/>
-              <a:t>a) </a:t>
-            </a:r>
-            <a:r>
-              <a:rPr lang="en-US" sz="1100" dirty="0" err="1"/>
-              <a:t>SINDy</a:t>
-            </a:r>
-            <a:endParaRPr lang="en-US" sz="1100" b="1" dirty="0"/>
-          </a:p>
-        </p:txBody>
-      </p:sp>
-      <p:pic>
-        <p:nvPicPr>
-          <p:cNvPr id="10" name="Picture 9">
-            <a:extLst>
-              <a:ext uri="{FF2B5EF4-FFF2-40B4-BE49-F238E27FC236}">
-                <a16:creationId xmlns:a16="http://schemas.microsoft.com/office/drawing/2014/main" id="{20655E92-A156-DBB2-48DD-2433901556F7}"/>
-              </a:ext>
-            </a:extLst>
-          </p:cNvPr>
-          <p:cNvPicPr>
-            <a:picLocks noChangeAspect="1"/>
-          </p:cNvPicPr>
-          <p:nvPr/>
-        </p:nvPicPr>
-        <p:blipFill>
-          <a:blip r:embed="rId3"/>
-          <a:stretch>
-            <a:fillRect/>
-          </a:stretch>
-        </p:blipFill>
-        <p:spPr>
-          <a:xfrm>
-            <a:off x="2545492" y="2582619"/>
-            <a:ext cx="4085967" cy="2042984"/>
-          </a:xfrm>
-          <a:prstGeom prst="rect">
-            <a:avLst/>
-          </a:prstGeom>
-        </p:spPr>
-      </p:pic>
-      <p:sp>
-        <p:nvSpPr>
-          <p:cNvPr id="11" name="TextBox 10">
-            <a:extLst>
-              <a:ext uri="{FF2B5EF4-FFF2-40B4-BE49-F238E27FC236}">
-                <a16:creationId xmlns:a16="http://schemas.microsoft.com/office/drawing/2014/main" id="{0E7B52B4-01D8-0898-7E41-8B0419FB3EE4}"/>
-              </a:ext>
-            </a:extLst>
-          </p:cNvPr>
-          <p:cNvSpPr txBox="1"/>
-          <p:nvPr/>
-        </p:nvSpPr>
-        <p:spPr>
-          <a:xfrm>
-            <a:off x="2457473" y="2486139"/>
-            <a:ext cx="1240060" cy="261610"/>
-          </a:xfrm>
-          <a:prstGeom prst="rect">
-            <a:avLst/>
-          </a:prstGeom>
-          <a:noFill/>
-        </p:spPr>
-        <p:txBody>
-          <a:bodyPr wrap="square" rtlCol="0">
-            <a:spAutoFit/>
-          </a:bodyPr>
-          <a:lstStyle/>
-          <a:p>
-            <a:r>
-              <a:rPr lang="en-US" sz="1100" b="1" dirty="0"/>
-              <a:t>b) </a:t>
-            </a:r>
-            <a:r>
-              <a:rPr lang="en-US" sz="1100" dirty="0"/>
-              <a:t>NN-driven</a:t>
-            </a:r>
-            <a:endParaRPr lang="en-US" sz="1100" b="1" dirty="0"/>
-          </a:p>
-        </p:txBody>
-      </p:sp>
-      <p:pic>
-        <p:nvPicPr>
-          <p:cNvPr id="13" name="Picture 12">
-            <a:extLst>
-              <a:ext uri="{FF2B5EF4-FFF2-40B4-BE49-F238E27FC236}">
-                <a16:creationId xmlns:a16="http://schemas.microsoft.com/office/drawing/2014/main" id="{74AB1E86-D1E8-833F-D3A9-6D08ED0F85E9}"/>
-              </a:ext>
-            </a:extLst>
-          </p:cNvPr>
-          <p:cNvPicPr>
-            <a:picLocks noChangeAspect="1"/>
-          </p:cNvPicPr>
-          <p:nvPr/>
-        </p:nvPicPr>
-        <p:blipFill>
-          <a:blip r:embed="rId4"/>
-          <a:stretch>
-            <a:fillRect/>
-          </a:stretch>
-        </p:blipFill>
-        <p:spPr>
-          <a:xfrm>
-            <a:off x="2534657" y="4691507"/>
-            <a:ext cx="4085968" cy="2042984"/>
-          </a:xfrm>
-          <a:prstGeom prst="rect">
-            <a:avLst/>
-          </a:prstGeom>
-        </p:spPr>
-      </p:pic>
-      <p:sp>
-        <p:nvSpPr>
-          <p:cNvPr id="14" name="TextBox 13">
-            <a:extLst>
-              <a:ext uri="{FF2B5EF4-FFF2-40B4-BE49-F238E27FC236}">
-                <a16:creationId xmlns:a16="http://schemas.microsoft.com/office/drawing/2014/main" id="{1BC1A71A-BE91-75CF-E81F-7AD88F0EFF75}"/>
-              </a:ext>
-            </a:extLst>
-          </p:cNvPr>
-          <p:cNvSpPr txBox="1"/>
-          <p:nvPr/>
-        </p:nvSpPr>
-        <p:spPr>
-          <a:xfrm>
-            <a:off x="2545492" y="4596400"/>
-            <a:ext cx="841709" cy="261610"/>
-          </a:xfrm>
-          <a:prstGeom prst="rect">
-            <a:avLst/>
-          </a:prstGeom>
-          <a:noFill/>
-        </p:spPr>
-        <p:txBody>
-          <a:bodyPr wrap="square" rtlCol="0">
-            <a:spAutoFit/>
-          </a:bodyPr>
-          <a:lstStyle/>
-          <a:p>
-            <a:r>
-              <a:rPr lang="en-US" sz="1100" b="1" dirty="0"/>
-              <a:t>c) </a:t>
-            </a:r>
-            <a:r>
-              <a:rPr lang="en-US" sz="1100" dirty="0"/>
-              <a:t>AR</a:t>
-            </a:r>
-            <a:endParaRPr lang="en-US" sz="1100" b="1" dirty="0"/>
-          </a:p>
-        </p:txBody>
-      </p:sp>
-    </p:spTree>
-    <p:extLst>
-      <p:ext uri="{BB962C8B-B14F-4D97-AF65-F5344CB8AC3E}">
-        <p14:creationId xmlns:p14="http://schemas.microsoft.com/office/powerpoint/2010/main" val="1736462962"/>
-      </p:ext>
-    </p:extLst>
-  </p:cSld>
-  <p:clrMapOvr>
-    <a:masterClrMapping/>
-  </p:clrMapOvr>
-</p:sld>
-</file>
-
-<file path=ppt/slides/slide6.xml><?xml version="1.0" encoding="utf-8"?>
-<p:sld xmlns:a="http://schemas.openxmlformats.org/drawingml/2006/main" xmlns:r="http://schemas.openxmlformats.org/officeDocument/2006/relationships" xmlns:p="http://schemas.openxmlformats.org/presentationml/2006/main">
-  <p:cSld>
-    <p:spTree>
-      <p:nvGrpSpPr>
         <p:cNvPr id="1" name="">
           <a:extLst>
             <a:ext uri="{FF2B5EF4-FFF2-40B4-BE49-F238E27FC236}">
@@ -9238,10 +8967,10 @@
       </p:grpSpPr>
       <p:pic>
         <p:nvPicPr>
-          <p:cNvPr id="3" name="Picture 2">
-            <a:extLst>
-              <a:ext uri="{FF2B5EF4-FFF2-40B4-BE49-F238E27FC236}">
-                <a16:creationId xmlns:a16="http://schemas.microsoft.com/office/drawing/2014/main" id="{98F1A68F-3818-B41E-CE5F-3A2CD714ACA6}"/>
+          <p:cNvPr id="12" name="Picture 11">
+            <a:extLst>
+              <a:ext uri="{FF2B5EF4-FFF2-40B4-BE49-F238E27FC236}">
+                <a16:creationId xmlns:a16="http://schemas.microsoft.com/office/drawing/2014/main" id="{3B0EDECF-1C9C-797C-64FA-97B0B50AAA30}"/>
               </a:ext>
             </a:extLst>
           </p:cNvPr>
@@ -9258,8 +8987,8 @@
         </p:blipFill>
         <p:spPr>
           <a:xfrm>
-            <a:off x="2534657" y="4593449"/>
-            <a:ext cx="4493937" cy="2246969"/>
+            <a:off x="2534654" y="4586805"/>
+            <a:ext cx="4493940" cy="2246970"/>
           </a:xfrm>
           <a:prstGeom prst="rect">
             <a:avLst/>
@@ -9268,10 +8997,10 @@
       </p:pic>
       <p:pic>
         <p:nvPicPr>
-          <p:cNvPr id="7" name="Picture 6">
-            <a:extLst>
-              <a:ext uri="{FF2B5EF4-FFF2-40B4-BE49-F238E27FC236}">
-                <a16:creationId xmlns:a16="http://schemas.microsoft.com/office/drawing/2014/main" id="{930F7D46-E8B9-8B38-B113-97E201573CC2}"/>
+          <p:cNvPr id="4" name="Picture 3">
+            <a:extLst>
+              <a:ext uri="{FF2B5EF4-FFF2-40B4-BE49-F238E27FC236}">
+                <a16:creationId xmlns:a16="http://schemas.microsoft.com/office/drawing/2014/main" id="{31EFFF37-7AD6-C6C2-E20D-198CFAFD4C7B}"/>
               </a:ext>
             </a:extLst>
           </p:cNvPr>
@@ -9288,8 +9017,8 @@
         </p:blipFill>
         <p:spPr>
           <a:xfrm>
-            <a:off x="2545492" y="290440"/>
-            <a:ext cx="4493937" cy="2246969"/>
+            <a:off x="2534656" y="292110"/>
+            <a:ext cx="4493938" cy="2246969"/>
           </a:xfrm>
           <a:prstGeom prst="rect">
             <a:avLst/>
@@ -9298,10 +9027,10 @@
       </p:pic>
       <p:pic>
         <p:nvPicPr>
-          <p:cNvPr id="9" name="Picture 8">
-            <a:extLst>
-              <a:ext uri="{FF2B5EF4-FFF2-40B4-BE49-F238E27FC236}">
-                <a16:creationId xmlns:a16="http://schemas.microsoft.com/office/drawing/2014/main" id="{84392866-86A5-2DC9-74F1-367B16EDCD46}"/>
+          <p:cNvPr id="8" name="Picture 7">
+            <a:extLst>
+              <a:ext uri="{FF2B5EF4-FFF2-40B4-BE49-F238E27FC236}">
+                <a16:creationId xmlns:a16="http://schemas.microsoft.com/office/drawing/2014/main" id="{9336BABA-3263-308B-55C4-F3117C52DA78}"/>
               </a:ext>
             </a:extLst>
           </p:cNvPr>
@@ -9318,7 +9047,7 @@
         </p:blipFill>
         <p:spPr>
           <a:xfrm>
-            <a:off x="2545492" y="2480236"/>
+            <a:off x="2534656" y="2464656"/>
             <a:ext cx="4493938" cy="2246969"/>
           </a:xfrm>
           <a:prstGeom prst="rect">
@@ -9359,7 +9088,7 @@
               <a:t>a) </a:t>
             </a:r>
             <a:r>
-              <a:rPr lang="en-US" sz="1100" dirty="0" err="1"/>
+              <a:rPr lang="en-US" sz="1100" dirty="0"/>
               <a:t>SINDy</a:t>
             </a:r>
             <a:endParaRPr lang="en-US" sz="1100" b="1" dirty="0"/>
@@ -9380,7 +9109,7 @@
         </p:nvSpPr>
         <p:spPr>
           <a:xfrm>
-            <a:off x="2457473" y="2486139"/>
+            <a:off x="2534654" y="2474250"/>
             <a:ext cx="1240060" cy="261610"/>
           </a:xfrm>
           <a:prstGeom prst="rect">
@@ -9400,7 +9129,7 @@
             </a:r>
             <a:r>
               <a:rPr lang="en-US" sz="1100" dirty="0"/>
-              <a:t>NN-driven</a:t>
+              <a:t>NN-derivative</a:t>
             </a:r>
             <a:endParaRPr lang="en-US" sz="1100" b="1" dirty="0"/>
           </a:p>
@@ -9459,7 +9188,7 @@
 </p:sld>
 </file>
 
-<file path=ppt/slides/slide7.xml><?xml version="1.0" encoding="utf-8"?>
+<file path=ppt/slides/slide6.xml><?xml version="1.0" encoding="utf-8"?>
 <p:sld xmlns:a="http://schemas.openxmlformats.org/drawingml/2006/main" xmlns:r="http://schemas.openxmlformats.org/officeDocument/2006/relationships" xmlns:p="http://schemas.openxmlformats.org/presentationml/2006/main">
   <p:cSld>
     <p:spTree>
@@ -9484,10 +9213,10 @@
       </p:grpSpPr>
       <p:pic>
         <p:nvPicPr>
-          <p:cNvPr id="18" name="Picture 17">
-            <a:extLst>
-              <a:ext uri="{FF2B5EF4-FFF2-40B4-BE49-F238E27FC236}">
-                <a16:creationId xmlns:a16="http://schemas.microsoft.com/office/drawing/2014/main" id="{DAA82645-09CB-B803-B916-9EB17C399C9B}"/>
+          <p:cNvPr id="24" name="Picture 23">
+            <a:extLst>
+              <a:ext uri="{FF2B5EF4-FFF2-40B4-BE49-F238E27FC236}">
+                <a16:creationId xmlns:a16="http://schemas.microsoft.com/office/drawing/2014/main" id="{89E35905-3C3D-C297-B4C9-829CF7CFBB90}"/>
               </a:ext>
             </a:extLst>
           </p:cNvPr>
@@ -9498,15 +9227,14 @@
         </p:nvPicPr>
         <p:blipFill>
           <a:blip r:embed="rId2"/>
-          <a:srcRect t="42026" b="33007"/>
           <a:stretch>
             <a:fillRect/>
           </a:stretch>
         </p:blipFill>
         <p:spPr>
           <a:xfrm>
-            <a:off x="1410755" y="5685184"/>
-            <a:ext cx="6550336" cy="981249"/>
+            <a:off x="1362909" y="36090"/>
+            <a:ext cx="6557220" cy="3278610"/>
           </a:xfrm>
           <a:prstGeom prst="rect">
             <a:avLst/>
@@ -9515,10 +9243,10 @@
       </p:pic>
       <p:pic>
         <p:nvPicPr>
-          <p:cNvPr id="8" name="Picture 7">
-            <a:extLst>
-              <a:ext uri="{FF2B5EF4-FFF2-40B4-BE49-F238E27FC236}">
-                <a16:creationId xmlns:a16="http://schemas.microsoft.com/office/drawing/2014/main" id="{88F8CDB0-6A4E-9F02-7527-865679F6B129}"/>
+          <p:cNvPr id="18" name="Picture 17">
+            <a:extLst>
+              <a:ext uri="{FF2B5EF4-FFF2-40B4-BE49-F238E27FC236}">
+                <a16:creationId xmlns:a16="http://schemas.microsoft.com/office/drawing/2014/main" id="{DAA82645-09CB-B803-B916-9EB17C399C9B}"/>
               </a:ext>
             </a:extLst>
           </p:cNvPr>
@@ -9529,14 +9257,15 @@
         </p:nvPicPr>
         <p:blipFill>
           <a:blip r:embed="rId3"/>
+          <a:srcRect t="42026" b="33007"/>
           <a:stretch>
             <a:fillRect/>
           </a:stretch>
         </p:blipFill>
         <p:spPr>
           <a:xfrm>
-            <a:off x="1663039" y="143306"/>
-            <a:ext cx="6054497" cy="3027249"/>
+            <a:off x="1410755" y="5791514"/>
+            <a:ext cx="6550336" cy="981249"/>
           </a:xfrm>
           <a:prstGeom prst="rect">
             <a:avLst/>
@@ -9600,7 +9329,7 @@
         </p:nvSpPr>
         <p:spPr>
           <a:xfrm>
-            <a:off x="1456843" y="265668"/>
+            <a:off x="1456841" y="173335"/>
             <a:ext cx="841709" cy="276999"/>
           </a:xfrm>
           <a:prstGeom prst="rect">
@@ -9635,7 +9364,7 @@
         </p:nvSpPr>
         <p:spPr>
           <a:xfrm>
-            <a:off x="1472618" y="3121223"/>
+            <a:off x="1472618" y="3227553"/>
             <a:ext cx="1013798" cy="276999"/>
           </a:xfrm>
           <a:prstGeom prst="rect">
@@ -9654,7 +9383,7 @@
               <a:t>b) </a:t>
             </a:r>
             <a:r>
-              <a:rPr lang="en-US" sz="1200" dirty="0" err="1"/>
+              <a:rPr lang="en-US" sz="1200" dirty="0"/>
               <a:t>SINDy</a:t>
             </a:r>
             <a:endParaRPr lang="en-US" sz="1200" b="1" dirty="0"/>
@@ -9675,8 +9404,8 @@
         </p:nvSpPr>
         <p:spPr>
           <a:xfrm>
-            <a:off x="1456841" y="4389363"/>
-            <a:ext cx="1240060" cy="276999"/>
+            <a:off x="1456840" y="4495693"/>
+            <a:ext cx="1358839" cy="276999"/>
           </a:xfrm>
           <a:prstGeom prst="rect">
             <a:avLst/>
@@ -9695,7 +9424,7 @@
             </a:r>
             <a:r>
               <a:rPr lang="en-US" sz="1200" dirty="0"/>
-              <a:t>NN-driven</a:t>
+              <a:t>NN-derivative</a:t>
             </a:r>
             <a:endParaRPr lang="en-US" sz="1200" b="1" dirty="0"/>
           </a:p>
@@ -9715,7 +9444,7 @@
         </p:nvSpPr>
         <p:spPr>
           <a:xfrm>
-            <a:off x="1456841" y="5460003"/>
+            <a:off x="1456841" y="5566333"/>
             <a:ext cx="841709" cy="276999"/>
           </a:xfrm>
           <a:prstGeom prst="rect">
@@ -9764,7 +9493,7 @@
         </p:blipFill>
         <p:spPr>
           <a:xfrm>
-            <a:off x="1419874" y="4611850"/>
+            <a:off x="1419874" y="4718180"/>
             <a:ext cx="6541216" cy="848153"/>
           </a:xfrm>
           <a:prstGeom prst="rect">
@@ -9786,7 +9515,7 @@
         </p:nvSpPr>
         <p:spPr>
           <a:xfrm>
-            <a:off x="6954792" y="6472393"/>
+            <a:off x="6954792" y="6578723"/>
             <a:ext cx="704486" cy="261610"/>
           </a:xfrm>
           <a:prstGeom prst="rect">
@@ -9821,7 +9550,7 @@
         </p:nvSpPr>
         <p:spPr>
           <a:xfrm>
-            <a:off x="2499926" y="6475530"/>
+            <a:off x="2499926" y="6581860"/>
             <a:ext cx="704486" cy="261610"/>
           </a:xfrm>
           <a:prstGeom prst="rect">
@@ -9856,7 +9585,7 @@
         </p:nvSpPr>
         <p:spPr>
           <a:xfrm>
-            <a:off x="5621327" y="6494979"/>
+            <a:off x="5621327" y="6601309"/>
             <a:ext cx="459331" cy="261610"/>
           </a:xfrm>
           <a:prstGeom prst="rect">
@@ -9891,7 +9620,7 @@
         </p:nvSpPr>
         <p:spPr>
           <a:xfrm>
-            <a:off x="2852169" y="6482920"/>
+            <a:off x="2852169" y="6589250"/>
             <a:ext cx="704486" cy="261610"/>
           </a:xfrm>
           <a:prstGeom prst="rect">
@@ -9926,7 +9655,7 @@
         </p:nvGrpSpPr>
         <p:grpSpPr>
           <a:xfrm>
-            <a:off x="1419874" y="3121223"/>
+            <a:off x="1419874" y="3227553"/>
             <a:ext cx="6541216" cy="3398903"/>
             <a:chOff x="1419874" y="3121223"/>
             <a:chExt cx="6541216" cy="3398903"/>
@@ -10128,7 +9857,7 @@
         </p:nvSpPr>
         <p:spPr>
           <a:xfrm>
-            <a:off x="3813717" y="3097658"/>
+            <a:off x="3813717" y="3203988"/>
             <a:ext cx="1991557" cy="128762"/>
           </a:xfrm>
           <a:prstGeom prst="rect">
@@ -10189,7 +9918,7 @@
         </p:blipFill>
         <p:spPr>
           <a:xfrm>
-            <a:off x="4435431" y="3114575"/>
+            <a:off x="4435431" y="3220905"/>
             <a:ext cx="1013798" cy="128762"/>
           </a:xfrm>
           <a:prstGeom prst="rect">
@@ -10211,7 +9940,7 @@
         </p:nvSpPr>
         <p:spPr>
           <a:xfrm>
-            <a:off x="2966262" y="3665285"/>
+            <a:off x="2966262" y="3771615"/>
             <a:ext cx="45719" cy="2872758"/>
           </a:xfrm>
           <a:prstGeom prst="rect">
@@ -10265,7 +9994,7 @@
         </p:nvSpPr>
         <p:spPr>
           <a:xfrm>
-            <a:off x="5805273" y="3647668"/>
+            <a:off x="5805273" y="3753998"/>
             <a:ext cx="45719" cy="2872758"/>
           </a:xfrm>
           <a:prstGeom prst="rect">
@@ -10319,7 +10048,7 @@
         </p:nvSpPr>
         <p:spPr>
           <a:xfrm>
-            <a:off x="1472618" y="3241257"/>
+            <a:off x="1472618" y="3347587"/>
             <a:ext cx="1240060" cy="276999"/>
           </a:xfrm>
           <a:prstGeom prst="rect">
@@ -10338,7 +10067,7 @@
               <a:t>b) </a:t>
             </a:r>
             <a:r>
-              <a:rPr lang="en-US" sz="1200" dirty="0" err="1"/>
+              <a:rPr lang="en-US" sz="1200" dirty="0"/>
               <a:t>SINDy</a:t>
             </a:r>
             <a:endParaRPr lang="en-US" sz="1200" b="1" dirty="0"/>
@@ -10359,7 +10088,7 @@
         </p:nvGrpSpPr>
         <p:grpSpPr>
           <a:xfrm>
-            <a:off x="7084684" y="3640137"/>
+            <a:off x="7084684" y="3746467"/>
             <a:ext cx="54232" cy="2854842"/>
             <a:chOff x="6646426" y="3652754"/>
             <a:chExt cx="54232" cy="2854842"/>

--- a/figures/figures.pptx
+++ b/figures/figures.pptx
@@ -264,7 +264,7 @@
           <a:p>
             <a:fld id="{75A9CF98-CC55-774D-9AE2-4D7D2CE05F38}" type="datetimeFigureOut">
               <a:rPr lang="en-US" smtClean="0"/>
-              <a:t>10/23/25</a:t>
+              <a:t>2/17/26</a:t>
             </a:fld>
             <a:endParaRPr lang="en-US"/>
           </a:p>
@@ -462,7 +462,7 @@
           <a:p>
             <a:fld id="{75A9CF98-CC55-774D-9AE2-4D7D2CE05F38}" type="datetimeFigureOut">
               <a:rPr lang="en-US" smtClean="0"/>
-              <a:t>10/23/25</a:t>
+              <a:t>2/17/26</a:t>
             </a:fld>
             <a:endParaRPr lang="en-US"/>
           </a:p>
@@ -670,7 +670,7 @@
           <a:p>
             <a:fld id="{75A9CF98-CC55-774D-9AE2-4D7D2CE05F38}" type="datetimeFigureOut">
               <a:rPr lang="en-US" smtClean="0"/>
-              <a:t>10/23/25</a:t>
+              <a:t>2/17/26</a:t>
             </a:fld>
             <a:endParaRPr lang="en-US"/>
           </a:p>
@@ -868,7 +868,7 @@
           <a:p>
             <a:fld id="{75A9CF98-CC55-774D-9AE2-4D7D2CE05F38}" type="datetimeFigureOut">
               <a:rPr lang="en-US" smtClean="0"/>
-              <a:t>10/23/25</a:t>
+              <a:t>2/17/26</a:t>
             </a:fld>
             <a:endParaRPr lang="en-US"/>
           </a:p>
@@ -1143,7 +1143,7 @@
           <a:p>
             <a:fld id="{75A9CF98-CC55-774D-9AE2-4D7D2CE05F38}" type="datetimeFigureOut">
               <a:rPr lang="en-US" smtClean="0"/>
-              <a:t>10/23/25</a:t>
+              <a:t>2/17/26</a:t>
             </a:fld>
             <a:endParaRPr lang="en-US"/>
           </a:p>
@@ -1408,7 +1408,7 @@
           <a:p>
             <a:fld id="{75A9CF98-CC55-774D-9AE2-4D7D2CE05F38}" type="datetimeFigureOut">
               <a:rPr lang="en-US" smtClean="0"/>
-              <a:t>10/23/25</a:t>
+              <a:t>2/17/26</a:t>
             </a:fld>
             <a:endParaRPr lang="en-US"/>
           </a:p>
@@ -1820,7 +1820,7 @@
           <a:p>
             <a:fld id="{75A9CF98-CC55-774D-9AE2-4D7D2CE05F38}" type="datetimeFigureOut">
               <a:rPr lang="en-US" smtClean="0"/>
-              <a:t>10/23/25</a:t>
+              <a:t>2/17/26</a:t>
             </a:fld>
             <a:endParaRPr lang="en-US"/>
           </a:p>
@@ -1961,7 +1961,7 @@
           <a:p>
             <a:fld id="{75A9CF98-CC55-774D-9AE2-4D7D2CE05F38}" type="datetimeFigureOut">
               <a:rPr lang="en-US" smtClean="0"/>
-              <a:t>10/23/25</a:t>
+              <a:t>2/17/26</a:t>
             </a:fld>
             <a:endParaRPr lang="en-US"/>
           </a:p>
@@ -2074,7 +2074,7 @@
           <a:p>
             <a:fld id="{75A9CF98-CC55-774D-9AE2-4D7D2CE05F38}" type="datetimeFigureOut">
               <a:rPr lang="en-US" smtClean="0"/>
-              <a:t>10/23/25</a:t>
+              <a:t>2/17/26</a:t>
             </a:fld>
             <a:endParaRPr lang="en-US"/>
           </a:p>
@@ -2385,7 +2385,7 @@
           <a:p>
             <a:fld id="{75A9CF98-CC55-774D-9AE2-4D7D2CE05F38}" type="datetimeFigureOut">
               <a:rPr lang="en-US" smtClean="0"/>
-              <a:t>10/23/25</a:t>
+              <a:t>2/17/26</a:t>
             </a:fld>
             <a:endParaRPr lang="en-US"/>
           </a:p>
@@ -2673,7 +2673,7 @@
           <a:p>
             <a:fld id="{75A9CF98-CC55-774D-9AE2-4D7D2CE05F38}" type="datetimeFigureOut">
               <a:rPr lang="en-US" smtClean="0"/>
-              <a:t>10/23/25</a:t>
+              <a:t>2/17/26</a:t>
             </a:fld>
             <a:endParaRPr lang="en-US"/>
           </a:p>
@@ -2914,7 +2914,7 @@
           <a:p>
             <a:fld id="{75A9CF98-CC55-774D-9AE2-4D7D2CE05F38}" type="datetimeFigureOut">
               <a:rPr lang="en-US" smtClean="0"/>
-              <a:t>10/23/25</a:t>
+              <a:t>2/17/26</a:t>
             </a:fld>
             <a:endParaRPr lang="en-US"/>
           </a:p>
@@ -8248,10 +8248,10 @@
       </p:grpSpPr>
       <p:pic>
         <p:nvPicPr>
-          <p:cNvPr id="7" name="Picture 6">
-            <a:extLst>
-              <a:ext uri="{FF2B5EF4-FFF2-40B4-BE49-F238E27FC236}">
-                <a16:creationId xmlns:a16="http://schemas.microsoft.com/office/drawing/2014/main" id="{6CBA3C59-9D86-68AE-5F26-96C922E82678}"/>
+          <p:cNvPr id="40" name="Picture 39">
+            <a:extLst>
+              <a:ext uri="{FF2B5EF4-FFF2-40B4-BE49-F238E27FC236}">
+                <a16:creationId xmlns:a16="http://schemas.microsoft.com/office/drawing/2014/main" id="{A43143B8-00B7-0DF4-24A4-BEC61634C8AD}"/>
               </a:ext>
             </a:extLst>
           </p:cNvPr>
@@ -8268,63 +8268,20 @@
         </p:blipFill>
         <p:spPr>
           <a:xfrm>
-            <a:off x="1472618" y="352308"/>
-            <a:ext cx="6326505" cy="2811780"/>
+            <a:off x="1352108" y="29469"/>
+            <a:ext cx="6806986" cy="3025327"/>
           </a:xfrm>
           <a:prstGeom prst="rect">
             <a:avLst/>
           </a:prstGeom>
         </p:spPr>
       </p:pic>
-      <p:sp>
-        <p:nvSpPr>
-          <p:cNvPr id="10" name="TextBox 9">
-            <a:extLst>
-              <a:ext uri="{FF2B5EF4-FFF2-40B4-BE49-F238E27FC236}">
-                <a16:creationId xmlns:a16="http://schemas.microsoft.com/office/drawing/2014/main" id="{1AC15706-19FA-F1F8-50C9-256D40185904}"/>
-              </a:ext>
-            </a:extLst>
-          </p:cNvPr>
-          <p:cNvSpPr txBox="1"/>
-          <p:nvPr/>
-        </p:nvSpPr>
-        <p:spPr>
-          <a:xfrm>
-            <a:off x="8986641" y="81002"/>
-            <a:ext cx="3651354" cy="369332"/>
-          </a:xfrm>
-          <a:prstGeom prst="rect">
-            <a:avLst/>
-          </a:prstGeom>
-          <a:noFill/>
-        </p:spPr>
-        <p:txBody>
-          <a:bodyPr wrap="square" rtlCol="0">
-            <a:spAutoFit/>
-          </a:bodyPr>
-          <a:lstStyle/>
-          <a:p>
-            <a:r>
-              <a:rPr lang="en-US" dirty="0"/>
-              <a:t>Figure 4 concept (</a:t>
-            </a:r>
-            <a:r>
-              <a:rPr lang="en-US" dirty="0" err="1"/>
-              <a:t>NNdzdt</a:t>
-            </a:r>
-            <a:r>
-              <a:rPr lang="en-US" dirty="0"/>
-              <a:t>)</a:t>
-            </a:r>
-          </a:p>
-        </p:txBody>
-      </p:sp>
       <p:pic>
         <p:nvPicPr>
-          <p:cNvPr id="36" name="Picture 35">
-            <a:extLst>
-              <a:ext uri="{FF2B5EF4-FFF2-40B4-BE49-F238E27FC236}">
-                <a16:creationId xmlns:a16="http://schemas.microsoft.com/office/drawing/2014/main" id="{B89A3767-2AE1-67D8-B2DD-1AA000E5225D}"/>
+          <p:cNvPr id="17" name="Picture 16">
+            <a:extLst>
+              <a:ext uri="{FF2B5EF4-FFF2-40B4-BE49-F238E27FC236}">
+                <a16:creationId xmlns:a16="http://schemas.microsoft.com/office/drawing/2014/main" id="{CD365C96-DC9B-787D-70DC-9506384FE22B}"/>
               </a:ext>
             </a:extLst>
           </p:cNvPr>
@@ -8335,563 +8292,15 @@
         </p:nvPicPr>
         <p:blipFill>
           <a:blip r:embed="rId3"/>
-          <a:srcRect l="25163" t="30501" r="26851" b="34140"/>
+          <a:srcRect l="24183" t="44381" r="26307" b="38156"/>
           <a:stretch>
             <a:fillRect/>
           </a:stretch>
         </p:blipFill>
         <p:spPr>
           <a:xfrm>
-            <a:off x="1472618" y="3082789"/>
-            <a:ext cx="6426400" cy="1420608"/>
-          </a:xfrm>
-          <a:prstGeom prst="rect">
-            <a:avLst/>
-          </a:prstGeom>
-        </p:spPr>
-      </p:pic>
-      <p:sp>
-        <p:nvSpPr>
-          <p:cNvPr id="21" name="TextBox 20">
-            <a:extLst>
-              <a:ext uri="{FF2B5EF4-FFF2-40B4-BE49-F238E27FC236}">
-                <a16:creationId xmlns:a16="http://schemas.microsoft.com/office/drawing/2014/main" id="{E9E2FBCF-1310-E099-5DC1-43F723F20C02}"/>
-              </a:ext>
-            </a:extLst>
-          </p:cNvPr>
-          <p:cNvSpPr txBox="1"/>
-          <p:nvPr/>
-        </p:nvSpPr>
-        <p:spPr>
-          <a:xfrm>
-            <a:off x="1456843" y="265668"/>
-            <a:ext cx="841709" cy="276999"/>
-          </a:xfrm>
-          <a:prstGeom prst="rect">
-            <a:avLst/>
-          </a:prstGeom>
-          <a:noFill/>
-        </p:spPr>
-        <p:txBody>
-          <a:bodyPr wrap="square" rtlCol="0">
-            <a:spAutoFit/>
-          </a:bodyPr>
-          <a:lstStyle/>
-          <a:p>
-            <a:r>
-              <a:rPr lang="en-US" sz="1200" b="1" dirty="0"/>
-              <a:t>a)</a:t>
-            </a:r>
-          </a:p>
-        </p:txBody>
-      </p:sp>
-      <p:sp>
-        <p:nvSpPr>
-          <p:cNvPr id="22" name="TextBox 21">
-            <a:extLst>
-              <a:ext uri="{FF2B5EF4-FFF2-40B4-BE49-F238E27FC236}">
-                <a16:creationId xmlns:a16="http://schemas.microsoft.com/office/drawing/2014/main" id="{0ED42712-F12E-14C4-1513-953CA28B91C6}"/>
-              </a:ext>
-            </a:extLst>
-          </p:cNvPr>
-          <p:cNvSpPr txBox="1"/>
-          <p:nvPr/>
-        </p:nvSpPr>
-        <p:spPr>
-          <a:xfrm>
-            <a:off x="1472618" y="3121223"/>
-            <a:ext cx="1013798" cy="276999"/>
-          </a:xfrm>
-          <a:prstGeom prst="rect">
-            <a:avLst/>
-          </a:prstGeom>
-          <a:noFill/>
-        </p:spPr>
-        <p:txBody>
-          <a:bodyPr wrap="square" rtlCol="0">
-            <a:spAutoFit/>
-          </a:bodyPr>
-          <a:lstStyle/>
-          <a:p>
-            <a:r>
-              <a:rPr lang="en-US" sz="1200" b="1" dirty="0"/>
-              <a:t>b) </a:t>
-            </a:r>
-            <a:r>
-              <a:rPr lang="en-US" sz="1200" dirty="0"/>
-              <a:t>SINDy</a:t>
-            </a:r>
-            <a:endParaRPr lang="en-US" sz="1200" b="1" dirty="0"/>
-          </a:p>
-        </p:txBody>
-      </p:sp>
-      <p:grpSp>
-        <p:nvGrpSpPr>
-          <p:cNvPr id="30" name="Group 29">
-            <a:extLst>
-              <a:ext uri="{FF2B5EF4-FFF2-40B4-BE49-F238E27FC236}">
-                <a16:creationId xmlns:a16="http://schemas.microsoft.com/office/drawing/2014/main" id="{F95332E1-E96E-6894-2BB9-0788C160B6BA}"/>
-              </a:ext>
-            </a:extLst>
-          </p:cNvPr>
-          <p:cNvGrpSpPr/>
-          <p:nvPr/>
-        </p:nvGrpSpPr>
-        <p:grpSpPr>
-          <a:xfrm>
-            <a:off x="1489979" y="4644687"/>
-            <a:ext cx="6457951" cy="948072"/>
-            <a:chOff x="1270784" y="4947915"/>
-            <a:chExt cx="7715856" cy="1218440"/>
-          </a:xfrm>
-        </p:grpSpPr>
-        <p:pic>
-          <p:nvPicPr>
-            <p:cNvPr id="20" name="Picture 19">
-              <a:extLst>
-                <a:ext uri="{FF2B5EF4-FFF2-40B4-BE49-F238E27FC236}">
-                  <a16:creationId xmlns:a16="http://schemas.microsoft.com/office/drawing/2014/main" id="{53E1E383-A30A-1A4F-AC3F-6D69AAED2D9A}"/>
-                </a:ext>
-              </a:extLst>
-            </p:cNvPr>
-            <p:cNvPicPr>
-              <a:picLocks noChangeAspect="1"/>
-            </p:cNvPicPr>
-            <p:nvPr/>
-          </p:nvPicPr>
-          <p:blipFill>
-            <a:blip r:embed="rId4"/>
-            <a:srcRect l="25551" t="41292" r="26606" b="35304"/>
-            <a:stretch>
-              <a:fillRect/>
-            </a:stretch>
-          </p:blipFill>
-          <p:spPr>
-            <a:xfrm>
-              <a:off x="1270784" y="4947915"/>
-              <a:ext cx="7715856" cy="1132372"/>
-            </a:xfrm>
-            <a:prstGeom prst="rect">
-              <a:avLst/>
-            </a:prstGeom>
-            <a:ln w="19050">
-              <a:noFill/>
-            </a:ln>
-          </p:spPr>
-        </p:pic>
-        <p:sp>
-          <p:nvSpPr>
-            <p:cNvPr id="23" name="Rectangle 22">
-              <a:extLst>
-                <a:ext uri="{FF2B5EF4-FFF2-40B4-BE49-F238E27FC236}">
-                  <a16:creationId xmlns:a16="http://schemas.microsoft.com/office/drawing/2014/main" id="{806A2A18-044D-7325-C995-5E2D6957237E}"/>
-                </a:ext>
-              </a:extLst>
-            </p:cNvPr>
-            <p:cNvSpPr/>
-            <p:nvPr/>
-          </p:nvSpPr>
-          <p:spPr>
-            <a:xfrm>
-              <a:off x="8097864" y="5112369"/>
-              <a:ext cx="61994" cy="790413"/>
-            </a:xfrm>
-            <a:prstGeom prst="rect">
-              <a:avLst/>
-            </a:prstGeom>
-            <a:noFill/>
-            <a:ln>
-              <a:solidFill>
-                <a:schemeClr val="bg1"/>
-              </a:solidFill>
-            </a:ln>
-          </p:spPr>
-          <p:style>
-            <a:lnRef idx="2">
-              <a:schemeClr val="accent2"/>
-            </a:lnRef>
-            <a:fillRef idx="1">
-              <a:schemeClr val="lt1"/>
-            </a:fillRef>
-            <a:effectRef idx="0">
-              <a:schemeClr val="accent2"/>
-            </a:effectRef>
-            <a:fontRef idx="minor">
-              <a:schemeClr val="dk1"/>
-            </a:fontRef>
-          </p:style>
-          <p:txBody>
-            <a:bodyPr rtlCol="0" anchor="ctr"/>
-            <a:lstStyle/>
-            <a:p>
-              <a:pPr algn="ctr"/>
-              <a:endParaRPr lang="en-US"/>
-            </a:p>
-          </p:txBody>
-        </p:sp>
-        <p:sp>
-          <p:nvSpPr>
-            <p:cNvPr id="24" name="Rectangle 23">
-              <a:extLst>
-                <a:ext uri="{FF2B5EF4-FFF2-40B4-BE49-F238E27FC236}">
-                  <a16:creationId xmlns:a16="http://schemas.microsoft.com/office/drawing/2014/main" id="{1968F59C-7DFD-20FF-5566-05C89916F407}"/>
-                </a:ext>
-              </a:extLst>
-            </p:cNvPr>
-            <p:cNvSpPr/>
-            <p:nvPr/>
-          </p:nvSpPr>
-          <p:spPr>
-            <a:xfrm>
-              <a:off x="3104825" y="5111650"/>
-              <a:ext cx="61994" cy="790413"/>
-            </a:xfrm>
-            <a:prstGeom prst="rect">
-              <a:avLst/>
-            </a:prstGeom>
-            <a:noFill/>
-            <a:ln>
-              <a:solidFill>
-                <a:schemeClr val="bg1"/>
-              </a:solidFill>
-            </a:ln>
-          </p:spPr>
-          <p:style>
-            <a:lnRef idx="2">
-              <a:schemeClr val="accent2"/>
-            </a:lnRef>
-            <a:fillRef idx="1">
-              <a:schemeClr val="lt1"/>
-            </a:fillRef>
-            <a:effectRef idx="0">
-              <a:schemeClr val="accent2"/>
-            </a:effectRef>
-            <a:fontRef idx="minor">
-              <a:schemeClr val="dk1"/>
-            </a:fontRef>
-          </p:style>
-          <p:txBody>
-            <a:bodyPr rtlCol="0" anchor="ctr"/>
-            <a:lstStyle/>
-            <a:p>
-              <a:pPr algn="ctr"/>
-              <a:endParaRPr lang="en-US"/>
-            </a:p>
-          </p:txBody>
-        </p:sp>
-        <p:sp>
-          <p:nvSpPr>
-            <p:cNvPr id="25" name="Rectangle 24">
-              <a:extLst>
-                <a:ext uri="{FF2B5EF4-FFF2-40B4-BE49-F238E27FC236}">
-                  <a16:creationId xmlns:a16="http://schemas.microsoft.com/office/drawing/2014/main" id="{85ADE2DD-C830-8AA1-5DBE-97C098FE9F48}"/>
-                </a:ext>
-              </a:extLst>
-            </p:cNvPr>
-            <p:cNvSpPr/>
-            <p:nvPr/>
-          </p:nvSpPr>
-          <p:spPr>
-            <a:xfrm>
-              <a:off x="6364635" y="5112369"/>
-              <a:ext cx="61994" cy="790413"/>
-            </a:xfrm>
-            <a:prstGeom prst="rect">
-              <a:avLst/>
-            </a:prstGeom>
-            <a:noFill/>
-            <a:ln>
-              <a:solidFill>
-                <a:schemeClr val="bg1"/>
-              </a:solidFill>
-            </a:ln>
-          </p:spPr>
-          <p:style>
-            <a:lnRef idx="2">
-              <a:schemeClr val="accent2"/>
-            </a:lnRef>
-            <a:fillRef idx="1">
-              <a:schemeClr val="lt1"/>
-            </a:fillRef>
-            <a:effectRef idx="0">
-              <a:schemeClr val="accent2"/>
-            </a:effectRef>
-            <a:fontRef idx="minor">
-              <a:schemeClr val="dk1"/>
-            </a:fontRef>
-          </p:style>
-          <p:txBody>
-            <a:bodyPr rtlCol="0" anchor="ctr"/>
-            <a:lstStyle/>
-            <a:p>
-              <a:pPr algn="ctr"/>
-              <a:endParaRPr lang="en-US"/>
-            </a:p>
-          </p:txBody>
-        </p:sp>
-        <p:sp>
-          <p:nvSpPr>
-            <p:cNvPr id="26" name="TextBox 25">
-              <a:extLst>
-                <a:ext uri="{FF2B5EF4-FFF2-40B4-BE49-F238E27FC236}">
-                  <a16:creationId xmlns:a16="http://schemas.microsoft.com/office/drawing/2014/main" id="{41E7C119-6CC1-840C-A682-4A0F8BA962D4}"/>
-                </a:ext>
-              </a:extLst>
-            </p:cNvPr>
-            <p:cNvSpPr txBox="1"/>
-            <p:nvPr/>
-          </p:nvSpPr>
-          <p:spPr>
-            <a:xfrm>
-              <a:off x="2921756" y="5881607"/>
-              <a:ext cx="841709" cy="276999"/>
-            </a:xfrm>
-            <a:prstGeom prst="rect">
-              <a:avLst/>
-            </a:prstGeom>
-            <a:noFill/>
-          </p:spPr>
-          <p:txBody>
-            <a:bodyPr wrap="square" rtlCol="0">
-              <a:spAutoFit/>
-            </a:bodyPr>
-            <a:lstStyle/>
-            <a:p>
-              <a:r>
-                <a:rPr lang="en-US" sz="1200" i="1" dirty="0"/>
-                <a:t>P50</a:t>
-              </a:r>
-            </a:p>
-          </p:txBody>
-        </p:sp>
-        <p:sp>
-          <p:nvSpPr>
-            <p:cNvPr id="27" name="TextBox 26">
-              <a:extLst>
-                <a:ext uri="{FF2B5EF4-FFF2-40B4-BE49-F238E27FC236}">
-                  <a16:creationId xmlns:a16="http://schemas.microsoft.com/office/drawing/2014/main" id="{40550AFB-8D2D-4157-EF62-09269555323D}"/>
-                </a:ext>
-              </a:extLst>
-            </p:cNvPr>
-            <p:cNvSpPr txBox="1"/>
-            <p:nvPr/>
-          </p:nvSpPr>
-          <p:spPr>
-            <a:xfrm>
-              <a:off x="6181567" y="5881606"/>
-              <a:ext cx="841709" cy="276999"/>
-            </a:xfrm>
-            <a:prstGeom prst="rect">
-              <a:avLst/>
-            </a:prstGeom>
-            <a:noFill/>
-          </p:spPr>
-          <p:txBody>
-            <a:bodyPr wrap="square" rtlCol="0">
-              <a:spAutoFit/>
-            </a:bodyPr>
-            <a:lstStyle/>
-            <a:p>
-              <a:r>
-                <a:rPr lang="en-US" sz="1200" i="1" dirty="0"/>
-                <a:t>P90</a:t>
-              </a:r>
-            </a:p>
-          </p:txBody>
-        </p:sp>
-        <p:sp>
-          <p:nvSpPr>
-            <p:cNvPr id="28" name="TextBox 27">
-              <a:extLst>
-                <a:ext uri="{FF2B5EF4-FFF2-40B4-BE49-F238E27FC236}">
-                  <a16:creationId xmlns:a16="http://schemas.microsoft.com/office/drawing/2014/main" id="{7B23B2AF-7287-F328-42B6-B782700FEFA6}"/>
-                </a:ext>
-              </a:extLst>
-            </p:cNvPr>
-            <p:cNvSpPr txBox="1"/>
-            <p:nvPr/>
-          </p:nvSpPr>
-          <p:spPr>
-            <a:xfrm>
-              <a:off x="7914794" y="5889356"/>
-              <a:ext cx="841709" cy="276999"/>
-            </a:xfrm>
-            <a:prstGeom prst="rect">
-              <a:avLst/>
-            </a:prstGeom>
-            <a:noFill/>
-          </p:spPr>
-          <p:txBody>
-            <a:bodyPr wrap="square" rtlCol="0">
-              <a:spAutoFit/>
-            </a:bodyPr>
-            <a:lstStyle/>
-            <a:p>
-              <a:r>
-                <a:rPr lang="en-US" sz="1200" i="1" dirty="0"/>
-                <a:t>P10</a:t>
-              </a:r>
-            </a:p>
-          </p:txBody>
-        </p:sp>
-      </p:grpSp>
-      <p:sp>
-        <p:nvSpPr>
-          <p:cNvPr id="31" name="TextBox 30">
-            <a:extLst>
-              <a:ext uri="{FF2B5EF4-FFF2-40B4-BE49-F238E27FC236}">
-                <a16:creationId xmlns:a16="http://schemas.microsoft.com/office/drawing/2014/main" id="{E2C56078-3DE1-C826-3241-A978C08F126A}"/>
-              </a:ext>
-            </a:extLst>
-          </p:cNvPr>
-          <p:cNvSpPr txBox="1"/>
-          <p:nvPr/>
-        </p:nvSpPr>
-        <p:spPr>
-          <a:xfrm>
-            <a:off x="1456840" y="4389363"/>
-            <a:ext cx="1363067" cy="276999"/>
-          </a:xfrm>
-          <a:prstGeom prst="rect">
-            <a:avLst/>
-          </a:prstGeom>
-          <a:noFill/>
-        </p:spPr>
-        <p:txBody>
-          <a:bodyPr wrap="square" rtlCol="0">
-            <a:spAutoFit/>
-          </a:bodyPr>
-          <a:lstStyle/>
-          <a:p>
-            <a:r>
-              <a:rPr lang="en-US" sz="1200" b="1" dirty="0"/>
-              <a:t>c) </a:t>
-            </a:r>
-            <a:r>
-              <a:rPr lang="en-US" sz="1200" dirty="0"/>
-              <a:t>NN-derivative*</a:t>
-            </a:r>
-            <a:endParaRPr lang="en-US" sz="1200" b="1" dirty="0"/>
-          </a:p>
-        </p:txBody>
-      </p:sp>
-      <p:sp>
-        <p:nvSpPr>
-          <p:cNvPr id="32" name="TextBox 31">
-            <a:extLst>
-              <a:ext uri="{FF2B5EF4-FFF2-40B4-BE49-F238E27FC236}">
-                <a16:creationId xmlns:a16="http://schemas.microsoft.com/office/drawing/2014/main" id="{BEF1AA45-60D2-6D72-94A7-2D5AC5AD7312}"/>
-              </a:ext>
-            </a:extLst>
-          </p:cNvPr>
-          <p:cNvSpPr txBox="1"/>
-          <p:nvPr/>
-        </p:nvSpPr>
-        <p:spPr>
-          <a:xfrm>
-            <a:off x="1456841" y="5460003"/>
-            <a:ext cx="841709" cy="276999"/>
-          </a:xfrm>
-          <a:prstGeom prst="rect">
-            <a:avLst/>
-          </a:prstGeom>
-          <a:noFill/>
-        </p:spPr>
-        <p:txBody>
-          <a:bodyPr wrap="square" rtlCol="0">
-            <a:spAutoFit/>
-          </a:bodyPr>
-          <a:lstStyle/>
-          <a:p>
-            <a:r>
-              <a:rPr lang="en-US" sz="1200" b="1" dirty="0"/>
-              <a:t>d) </a:t>
-            </a:r>
-            <a:r>
-              <a:rPr lang="en-US" sz="1200" dirty="0"/>
-              <a:t>AR</a:t>
-            </a:r>
-            <a:endParaRPr lang="en-US" sz="1200" b="1" dirty="0"/>
-          </a:p>
-        </p:txBody>
-      </p:sp>
-      <p:sp>
-        <p:nvSpPr>
-          <p:cNvPr id="3" name="Rectangle 2">
-            <a:extLst>
-              <a:ext uri="{FF2B5EF4-FFF2-40B4-BE49-F238E27FC236}">
-                <a16:creationId xmlns:a16="http://schemas.microsoft.com/office/drawing/2014/main" id="{93884AC3-5AA5-0496-DD33-854737B2FBB4}"/>
-              </a:ext>
-            </a:extLst>
-          </p:cNvPr>
-          <p:cNvSpPr/>
-          <p:nvPr/>
-        </p:nvSpPr>
-        <p:spPr>
-          <a:xfrm>
-            <a:off x="3813717" y="3082790"/>
-            <a:ext cx="1991557" cy="128762"/>
-          </a:xfrm>
-          <a:prstGeom prst="rect">
-            <a:avLst/>
-          </a:prstGeom>
-          <a:solidFill>
-            <a:schemeClr val="bg1"/>
-          </a:solidFill>
-          <a:ln>
-            <a:noFill/>
-          </a:ln>
-        </p:spPr>
-        <p:style>
-          <a:lnRef idx="2">
-            <a:schemeClr val="accent1">
-              <a:shade val="15000"/>
-            </a:schemeClr>
-          </a:lnRef>
-          <a:fillRef idx="1">
-            <a:schemeClr val="accent1"/>
-          </a:fillRef>
-          <a:effectRef idx="0">
-            <a:schemeClr val="accent1"/>
-          </a:effectRef>
-          <a:fontRef idx="minor">
-            <a:schemeClr val="lt1"/>
-          </a:fontRef>
-        </p:style>
-        <p:txBody>
-          <a:bodyPr rtlCol="0" anchor="ctr"/>
-          <a:lstStyle/>
-          <a:p>
-            <a:pPr algn="ctr"/>
-            <a:endParaRPr lang="en-US"/>
-          </a:p>
-        </p:txBody>
-      </p:sp>
-      <p:pic>
-        <p:nvPicPr>
-          <p:cNvPr id="4" name="Picture 3">
-            <a:extLst>
-              <a:ext uri="{FF2B5EF4-FFF2-40B4-BE49-F238E27FC236}">
-                <a16:creationId xmlns:a16="http://schemas.microsoft.com/office/drawing/2014/main" id="{0204FB71-371B-2CB7-377D-1CF9CB50BEC6}"/>
-              </a:ext>
-            </a:extLst>
-          </p:cNvPr>
-          <p:cNvPicPr>
-            <a:picLocks noChangeAspect="1"/>
-          </p:cNvPicPr>
-          <p:nvPr/>
-        </p:nvPicPr>
-        <p:blipFill>
-          <a:blip r:embed="rId3"/>
-          <a:srcRect l="43095" t="31110" r="49335" b="65684"/>
-          <a:stretch>
-            <a:fillRect/>
-          </a:stretch>
-        </p:blipFill>
-        <p:spPr>
-          <a:xfrm>
-            <a:off x="4435431" y="3099707"/>
-            <a:ext cx="1013798" cy="128762"/>
+            <a:off x="1268613" y="4748801"/>
+            <a:ext cx="6721583" cy="711202"/>
           </a:xfrm>
           <a:prstGeom prst="rect">
             <a:avLst/>
@@ -8900,10 +8309,119 @@
       </p:pic>
       <p:pic>
         <p:nvPicPr>
-          <p:cNvPr id="5" name="Picture 4">
-            <a:extLst>
-              <a:ext uri="{FF2B5EF4-FFF2-40B4-BE49-F238E27FC236}">
-                <a16:creationId xmlns:a16="http://schemas.microsoft.com/office/drawing/2014/main" id="{180ECAD3-0C79-C496-25E1-B5202C24BE53}"/>
+          <p:cNvPr id="14" name="Picture 13">
+            <a:extLst>
+              <a:ext uri="{FF2B5EF4-FFF2-40B4-BE49-F238E27FC236}">
+                <a16:creationId xmlns:a16="http://schemas.microsoft.com/office/drawing/2014/main" id="{E1B340B9-D755-21E7-F46F-E854EBBB89FB}"/>
+              </a:ext>
+            </a:extLst>
+          </p:cNvPr>
+          <p:cNvPicPr>
+            <a:picLocks noChangeAspect="1"/>
+          </p:cNvPicPr>
+          <p:nvPr/>
+        </p:nvPicPr>
+        <p:blipFill>
+          <a:blip r:embed="rId4"/>
+          <a:srcRect l="24824" t="33822" r="27155" b="37582"/>
+          <a:stretch>
+            <a:fillRect/>
+          </a:stretch>
+        </p:blipFill>
+        <p:spPr>
+          <a:xfrm>
+            <a:off x="1376445" y="3193335"/>
+            <a:ext cx="6491090" cy="1159590"/>
+          </a:xfrm>
+          <a:prstGeom prst="rect">
+            <a:avLst/>
+          </a:prstGeom>
+        </p:spPr>
+      </p:pic>
+      <p:sp>
+        <p:nvSpPr>
+          <p:cNvPr id="10" name="TextBox 9">
+            <a:extLst>
+              <a:ext uri="{FF2B5EF4-FFF2-40B4-BE49-F238E27FC236}">
+                <a16:creationId xmlns:a16="http://schemas.microsoft.com/office/drawing/2014/main" id="{1AC15706-19FA-F1F8-50C9-256D40185904}"/>
+              </a:ext>
+            </a:extLst>
+          </p:cNvPr>
+          <p:cNvSpPr txBox="1"/>
+          <p:nvPr/>
+        </p:nvSpPr>
+        <p:spPr>
+          <a:xfrm>
+            <a:off x="8986641" y="81002"/>
+            <a:ext cx="3651354" cy="369332"/>
+          </a:xfrm>
+          <a:prstGeom prst="rect">
+            <a:avLst/>
+          </a:prstGeom>
+          <a:noFill/>
+        </p:spPr>
+        <p:txBody>
+          <a:bodyPr wrap="square" rtlCol="0">
+            <a:spAutoFit/>
+          </a:bodyPr>
+          <a:lstStyle/>
+          <a:p>
+            <a:r>
+              <a:rPr lang="en-US" dirty="0"/>
+              <a:t>Figure 4 concept (</a:t>
+            </a:r>
+            <a:r>
+              <a:rPr lang="en-US" dirty="0" err="1"/>
+              <a:t>NNdzdt</a:t>
+            </a:r>
+            <a:r>
+              <a:rPr lang="en-US" dirty="0"/>
+              <a:t>)</a:t>
+            </a:r>
+          </a:p>
+        </p:txBody>
+      </p:sp>
+      <p:sp>
+        <p:nvSpPr>
+          <p:cNvPr id="21" name="TextBox 20">
+            <a:extLst>
+              <a:ext uri="{FF2B5EF4-FFF2-40B4-BE49-F238E27FC236}">
+                <a16:creationId xmlns:a16="http://schemas.microsoft.com/office/drawing/2014/main" id="{E9E2FBCF-1310-E099-5DC1-43F723F20C02}"/>
+              </a:ext>
+            </a:extLst>
+          </p:cNvPr>
+          <p:cNvSpPr txBox="1"/>
+          <p:nvPr/>
+        </p:nvSpPr>
+        <p:spPr>
+          <a:xfrm>
+            <a:off x="1456843" y="265668"/>
+            <a:ext cx="841709" cy="276999"/>
+          </a:xfrm>
+          <a:prstGeom prst="rect">
+            <a:avLst/>
+          </a:prstGeom>
+          <a:noFill/>
+        </p:spPr>
+        <p:txBody>
+          <a:bodyPr wrap="square" rtlCol="0">
+            <a:spAutoFit/>
+          </a:bodyPr>
+          <a:lstStyle/>
+          <a:p>
+            <a:r>
+              <a:rPr lang="en-US" sz="1200" b="1" dirty="0"/>
+              <a:t>a)</a:t>
+            </a:r>
+          </a:p>
+        </p:txBody>
+      </p:sp>
+      <p:pic>
+        <p:nvPicPr>
+          <p:cNvPr id="19" name="Picture 18">
+            <a:extLst>
+              <a:ext uri="{FF2B5EF4-FFF2-40B4-BE49-F238E27FC236}">
+                <a16:creationId xmlns:a16="http://schemas.microsoft.com/office/drawing/2014/main" id="{F9C7FBCB-F25F-9D47-BC14-8031A54DCA16}"/>
               </a:ext>
             </a:extLst>
           </p:cNvPr>
@@ -8914,21 +8432,443 @@
         </p:nvPicPr>
         <p:blipFill>
           <a:blip r:embed="rId5"/>
-          <a:srcRect l="24438" t="41096" r="25993" b="34290"/>
+          <a:srcRect l="24346" t="44370" r="25673" b="34768"/>
           <a:stretch>
             <a:fillRect/>
           </a:stretch>
         </p:blipFill>
         <p:spPr>
           <a:xfrm>
-            <a:off x="1312945" y="5696717"/>
-            <a:ext cx="6721583" cy="1001236"/>
+            <a:off x="1295507" y="5815050"/>
+            <a:ext cx="6782206" cy="849222"/>
           </a:xfrm>
           <a:prstGeom prst="rect">
             <a:avLst/>
           </a:prstGeom>
         </p:spPr>
       </p:pic>
+      <p:sp>
+        <p:nvSpPr>
+          <p:cNvPr id="22" name="TextBox 21">
+            <a:extLst>
+              <a:ext uri="{FF2B5EF4-FFF2-40B4-BE49-F238E27FC236}">
+                <a16:creationId xmlns:a16="http://schemas.microsoft.com/office/drawing/2014/main" id="{0ED42712-F12E-14C4-1513-953CA28B91C6}"/>
+              </a:ext>
+            </a:extLst>
+          </p:cNvPr>
+          <p:cNvSpPr txBox="1"/>
+          <p:nvPr/>
+        </p:nvSpPr>
+        <p:spPr>
+          <a:xfrm>
+            <a:off x="1472618" y="3121223"/>
+            <a:ext cx="1013798" cy="276999"/>
+          </a:xfrm>
+          <a:prstGeom prst="rect">
+            <a:avLst/>
+          </a:prstGeom>
+          <a:noFill/>
+        </p:spPr>
+        <p:txBody>
+          <a:bodyPr wrap="square" rtlCol="0">
+            <a:spAutoFit/>
+          </a:bodyPr>
+          <a:lstStyle/>
+          <a:p>
+            <a:r>
+              <a:rPr lang="en-US" sz="1200" b="1" dirty="0"/>
+              <a:t>b) </a:t>
+            </a:r>
+            <a:r>
+              <a:rPr lang="en-US" sz="1200" dirty="0"/>
+              <a:t>SINDy</a:t>
+            </a:r>
+            <a:endParaRPr lang="en-US" sz="1200" b="1" dirty="0"/>
+          </a:p>
+        </p:txBody>
+      </p:sp>
+      <p:sp>
+        <p:nvSpPr>
+          <p:cNvPr id="32" name="TextBox 31">
+            <a:extLst>
+              <a:ext uri="{FF2B5EF4-FFF2-40B4-BE49-F238E27FC236}">
+                <a16:creationId xmlns:a16="http://schemas.microsoft.com/office/drawing/2014/main" id="{BEF1AA45-60D2-6D72-94A7-2D5AC5AD7312}"/>
+              </a:ext>
+            </a:extLst>
+          </p:cNvPr>
+          <p:cNvSpPr txBox="1"/>
+          <p:nvPr/>
+        </p:nvSpPr>
+        <p:spPr>
+          <a:xfrm>
+            <a:off x="1456841" y="5460003"/>
+            <a:ext cx="841709" cy="276999"/>
+          </a:xfrm>
+          <a:prstGeom prst="rect">
+            <a:avLst/>
+          </a:prstGeom>
+          <a:noFill/>
+        </p:spPr>
+        <p:txBody>
+          <a:bodyPr wrap="square" rtlCol="0">
+            <a:spAutoFit/>
+          </a:bodyPr>
+          <a:lstStyle/>
+          <a:p>
+            <a:r>
+              <a:rPr lang="en-US" sz="1200" b="1" dirty="0"/>
+              <a:t>d) </a:t>
+            </a:r>
+            <a:r>
+              <a:rPr lang="en-US" sz="1200" dirty="0"/>
+              <a:t>AR</a:t>
+            </a:r>
+            <a:endParaRPr lang="en-US" sz="1200" b="1" dirty="0"/>
+          </a:p>
+        </p:txBody>
+      </p:sp>
+      <p:sp>
+        <p:nvSpPr>
+          <p:cNvPr id="15" name="TextBox 14">
+            <a:extLst>
+              <a:ext uri="{FF2B5EF4-FFF2-40B4-BE49-F238E27FC236}">
+                <a16:creationId xmlns:a16="http://schemas.microsoft.com/office/drawing/2014/main" id="{4A4DCB18-5E16-7397-22A9-ACD07ED96E00}"/>
+              </a:ext>
+            </a:extLst>
+          </p:cNvPr>
+          <p:cNvSpPr txBox="1"/>
+          <p:nvPr/>
+        </p:nvSpPr>
+        <p:spPr>
+          <a:xfrm>
+            <a:off x="4187930" y="3016977"/>
+            <a:ext cx="3291626" cy="230832"/>
+          </a:xfrm>
+          <a:prstGeom prst="rect">
+            <a:avLst/>
+          </a:prstGeom>
+          <a:noFill/>
+        </p:spPr>
+        <p:txBody>
+          <a:bodyPr wrap="square" rtlCol="0">
+            <a:spAutoFit/>
+          </a:bodyPr>
+          <a:lstStyle/>
+          <a:p>
+            <a:r>
+              <a:rPr lang="en-US" sz="900" dirty="0"/>
+              <a:t>Wasserstein Distance</a:t>
+            </a:r>
+          </a:p>
+        </p:txBody>
+      </p:sp>
+      <p:sp>
+        <p:nvSpPr>
+          <p:cNvPr id="29" name="Rectangle 28">
+            <a:extLst>
+              <a:ext uri="{FF2B5EF4-FFF2-40B4-BE49-F238E27FC236}">
+                <a16:creationId xmlns:a16="http://schemas.microsoft.com/office/drawing/2014/main" id="{E35F3BDF-1F62-967F-9F0A-FCCB0B16AF94}"/>
+              </a:ext>
+            </a:extLst>
+          </p:cNvPr>
+          <p:cNvSpPr/>
+          <p:nvPr/>
+        </p:nvSpPr>
+        <p:spPr>
+          <a:xfrm>
+            <a:off x="4755601" y="3610192"/>
+            <a:ext cx="45719" cy="2872758"/>
+          </a:xfrm>
+          <a:prstGeom prst="rect">
+            <a:avLst/>
+          </a:prstGeom>
+          <a:noFill/>
+          <a:ln>
+            <a:solidFill>
+              <a:schemeClr val="bg1"/>
+            </a:solidFill>
+          </a:ln>
+        </p:spPr>
+        <p:style>
+          <a:lnRef idx="2">
+            <a:schemeClr val="accent2"/>
+          </a:lnRef>
+          <a:fillRef idx="1">
+            <a:schemeClr val="lt1"/>
+          </a:fillRef>
+          <a:effectRef idx="0">
+            <a:schemeClr val="accent2"/>
+          </a:effectRef>
+          <a:fontRef idx="minor">
+            <a:schemeClr val="dk1"/>
+          </a:fontRef>
+        </p:style>
+        <p:txBody>
+          <a:bodyPr rtlCol="0" anchor="ctr"/>
+          <a:lstStyle/>
+          <a:p>
+            <a:pPr algn="ctr"/>
+            <a:endParaRPr lang="en-US" dirty="0"/>
+          </a:p>
+          <a:p>
+            <a:pPr algn="ctr"/>
+            <a:endParaRPr lang="en-US" dirty="0"/>
+          </a:p>
+        </p:txBody>
+      </p:sp>
+      <p:sp>
+        <p:nvSpPr>
+          <p:cNvPr id="33" name="Rectangle 32">
+            <a:extLst>
+              <a:ext uri="{FF2B5EF4-FFF2-40B4-BE49-F238E27FC236}">
+                <a16:creationId xmlns:a16="http://schemas.microsoft.com/office/drawing/2014/main" id="{72FFC593-A438-727C-8265-9A1315078E16}"/>
+              </a:ext>
+            </a:extLst>
+          </p:cNvPr>
+          <p:cNvSpPr/>
+          <p:nvPr/>
+        </p:nvSpPr>
+        <p:spPr>
+          <a:xfrm>
+            <a:off x="2318143" y="3642497"/>
+            <a:ext cx="45719" cy="2872758"/>
+          </a:xfrm>
+          <a:prstGeom prst="rect">
+            <a:avLst/>
+          </a:prstGeom>
+          <a:noFill/>
+          <a:ln>
+            <a:solidFill>
+              <a:schemeClr val="bg1"/>
+            </a:solidFill>
+          </a:ln>
+        </p:spPr>
+        <p:style>
+          <a:lnRef idx="2">
+            <a:schemeClr val="accent2"/>
+          </a:lnRef>
+          <a:fillRef idx="1">
+            <a:schemeClr val="lt1"/>
+          </a:fillRef>
+          <a:effectRef idx="0">
+            <a:schemeClr val="accent2"/>
+          </a:effectRef>
+          <a:fontRef idx="minor">
+            <a:schemeClr val="dk1"/>
+          </a:fontRef>
+        </p:style>
+        <p:txBody>
+          <a:bodyPr rtlCol="0" anchor="ctr"/>
+          <a:lstStyle/>
+          <a:p>
+            <a:pPr algn="ctr"/>
+            <a:endParaRPr lang="en-US" dirty="0"/>
+          </a:p>
+          <a:p>
+            <a:pPr algn="ctr"/>
+            <a:endParaRPr lang="en-US" dirty="0"/>
+          </a:p>
+        </p:txBody>
+      </p:sp>
+      <p:sp>
+        <p:nvSpPr>
+          <p:cNvPr id="34" name="Rectangle 33">
+            <a:extLst>
+              <a:ext uri="{FF2B5EF4-FFF2-40B4-BE49-F238E27FC236}">
+                <a16:creationId xmlns:a16="http://schemas.microsoft.com/office/drawing/2014/main" id="{3DD10866-9C7E-6120-CC20-C2A61B87D418}"/>
+              </a:ext>
+            </a:extLst>
+          </p:cNvPr>
+          <p:cNvSpPr/>
+          <p:nvPr/>
+        </p:nvSpPr>
+        <p:spPr>
+          <a:xfrm>
+            <a:off x="7139897" y="3642497"/>
+            <a:ext cx="45719" cy="2872758"/>
+          </a:xfrm>
+          <a:prstGeom prst="rect">
+            <a:avLst/>
+          </a:prstGeom>
+          <a:noFill/>
+          <a:ln>
+            <a:solidFill>
+              <a:schemeClr val="bg1"/>
+            </a:solidFill>
+          </a:ln>
+        </p:spPr>
+        <p:style>
+          <a:lnRef idx="2">
+            <a:schemeClr val="accent2"/>
+          </a:lnRef>
+          <a:fillRef idx="1">
+            <a:schemeClr val="lt1"/>
+          </a:fillRef>
+          <a:effectRef idx="0">
+            <a:schemeClr val="accent2"/>
+          </a:effectRef>
+          <a:fontRef idx="minor">
+            <a:schemeClr val="dk1"/>
+          </a:fontRef>
+        </p:style>
+        <p:txBody>
+          <a:bodyPr rtlCol="0" anchor="ctr"/>
+          <a:lstStyle/>
+          <a:p>
+            <a:pPr algn="ctr"/>
+            <a:endParaRPr lang="en-US" dirty="0"/>
+          </a:p>
+          <a:p>
+            <a:pPr algn="ctr"/>
+            <a:endParaRPr lang="en-US" dirty="0"/>
+          </a:p>
+        </p:txBody>
+      </p:sp>
+      <p:sp>
+        <p:nvSpPr>
+          <p:cNvPr id="35" name="TextBox 34">
+            <a:extLst>
+              <a:ext uri="{FF2B5EF4-FFF2-40B4-BE49-F238E27FC236}">
+                <a16:creationId xmlns:a16="http://schemas.microsoft.com/office/drawing/2014/main" id="{2D4F59A0-A278-A432-C5FE-304D937E32BB}"/>
+              </a:ext>
+            </a:extLst>
+          </p:cNvPr>
+          <p:cNvSpPr txBox="1"/>
+          <p:nvPr/>
+        </p:nvSpPr>
+        <p:spPr>
+          <a:xfrm>
+            <a:off x="6982067" y="6469089"/>
+            <a:ext cx="418704" cy="261610"/>
+          </a:xfrm>
+          <a:prstGeom prst="rect">
+            <a:avLst/>
+          </a:prstGeom>
+          <a:noFill/>
+        </p:spPr>
+        <p:txBody>
+          <a:bodyPr wrap="none" rtlCol="0">
+            <a:spAutoFit/>
+          </a:bodyPr>
+          <a:lstStyle/>
+          <a:p>
+            <a:r>
+              <a:rPr lang="en-US" sz="1100" i="1" dirty="0"/>
+              <a:t>P10</a:t>
+            </a:r>
+          </a:p>
+        </p:txBody>
+      </p:sp>
+      <p:sp>
+        <p:nvSpPr>
+          <p:cNvPr id="37" name="TextBox 36">
+            <a:extLst>
+              <a:ext uri="{FF2B5EF4-FFF2-40B4-BE49-F238E27FC236}">
+                <a16:creationId xmlns:a16="http://schemas.microsoft.com/office/drawing/2014/main" id="{57268E88-C29E-8747-D5DE-795DB55E6B11}"/>
+              </a:ext>
+            </a:extLst>
+          </p:cNvPr>
+          <p:cNvSpPr txBox="1"/>
+          <p:nvPr/>
+        </p:nvSpPr>
+        <p:spPr>
+          <a:xfrm>
+            <a:off x="4569108" y="6611515"/>
+            <a:ext cx="418704" cy="261610"/>
+          </a:xfrm>
+          <a:prstGeom prst="rect">
+            <a:avLst/>
+          </a:prstGeom>
+          <a:noFill/>
+        </p:spPr>
+        <p:txBody>
+          <a:bodyPr wrap="none" rtlCol="0">
+            <a:spAutoFit/>
+          </a:bodyPr>
+          <a:lstStyle/>
+          <a:p>
+            <a:r>
+              <a:rPr lang="en-US" sz="1100" i="1" dirty="0"/>
+              <a:t>P50</a:t>
+            </a:r>
+          </a:p>
+        </p:txBody>
+      </p:sp>
+      <p:sp>
+        <p:nvSpPr>
+          <p:cNvPr id="38" name="TextBox 37">
+            <a:extLst>
+              <a:ext uri="{FF2B5EF4-FFF2-40B4-BE49-F238E27FC236}">
+                <a16:creationId xmlns:a16="http://schemas.microsoft.com/office/drawing/2014/main" id="{09F62247-50C4-F6A0-19F2-334C713D490A}"/>
+              </a:ext>
+            </a:extLst>
+          </p:cNvPr>
+          <p:cNvSpPr txBox="1"/>
+          <p:nvPr/>
+        </p:nvSpPr>
+        <p:spPr>
+          <a:xfrm>
+            <a:off x="2131650" y="6482950"/>
+            <a:ext cx="418704" cy="261610"/>
+          </a:xfrm>
+          <a:prstGeom prst="rect">
+            <a:avLst/>
+          </a:prstGeom>
+          <a:noFill/>
+        </p:spPr>
+        <p:txBody>
+          <a:bodyPr wrap="none" rtlCol="0">
+            <a:spAutoFit/>
+          </a:bodyPr>
+          <a:lstStyle/>
+          <a:p>
+            <a:r>
+              <a:rPr lang="en-US" sz="1100" i="1" dirty="0"/>
+              <a:t>P90</a:t>
+            </a:r>
+          </a:p>
+        </p:txBody>
+      </p:sp>
+      <p:sp>
+        <p:nvSpPr>
+          <p:cNvPr id="31" name="TextBox 30">
+            <a:extLst>
+              <a:ext uri="{FF2B5EF4-FFF2-40B4-BE49-F238E27FC236}">
+                <a16:creationId xmlns:a16="http://schemas.microsoft.com/office/drawing/2014/main" id="{E2C56078-3DE1-C826-3241-A978C08F126A}"/>
+              </a:ext>
+            </a:extLst>
+          </p:cNvPr>
+          <p:cNvSpPr txBox="1"/>
+          <p:nvPr/>
+        </p:nvSpPr>
+        <p:spPr>
+          <a:xfrm>
+            <a:off x="1456840" y="4389363"/>
+            <a:ext cx="1363067" cy="276999"/>
+          </a:xfrm>
+          <a:prstGeom prst="rect">
+            <a:avLst/>
+          </a:prstGeom>
+          <a:noFill/>
+        </p:spPr>
+        <p:txBody>
+          <a:bodyPr wrap="square" rtlCol="0">
+            <a:spAutoFit/>
+          </a:bodyPr>
+          <a:lstStyle/>
+          <a:p>
+            <a:r>
+              <a:rPr lang="en-US" sz="1200" b="1" dirty="0"/>
+              <a:t>c) </a:t>
+            </a:r>
+            <a:r>
+              <a:rPr lang="en-US" sz="1200" dirty="0"/>
+              <a:t>NN-derivative*</a:t>
+            </a:r>
+            <a:endParaRPr lang="en-US" sz="1200" b="1" dirty="0"/>
+          </a:p>
+        </p:txBody>
+      </p:sp>
     </p:spTree>
     <p:extLst>
       <p:ext uri="{BB962C8B-B14F-4D97-AF65-F5344CB8AC3E}">
@@ -8967,10 +8907,10 @@
       </p:grpSpPr>
       <p:pic>
         <p:nvPicPr>
-          <p:cNvPr id="12" name="Picture 11">
-            <a:extLst>
-              <a:ext uri="{FF2B5EF4-FFF2-40B4-BE49-F238E27FC236}">
-                <a16:creationId xmlns:a16="http://schemas.microsoft.com/office/drawing/2014/main" id="{3B0EDECF-1C9C-797C-64FA-97B0B50AAA30}"/>
+          <p:cNvPr id="25" name="Picture 24">
+            <a:extLst>
+              <a:ext uri="{FF2B5EF4-FFF2-40B4-BE49-F238E27FC236}">
+                <a16:creationId xmlns:a16="http://schemas.microsoft.com/office/drawing/2014/main" id="{F6A34F99-9B51-2190-CBBF-3A145A04BCA5}"/>
               </a:ext>
             </a:extLst>
           </p:cNvPr>
@@ -8987,8 +8927,8 @@
         </p:blipFill>
         <p:spPr>
           <a:xfrm>
-            <a:off x="2534654" y="4586805"/>
-            <a:ext cx="4493940" cy="2246970"/>
+            <a:off x="2545492" y="344467"/>
+            <a:ext cx="4787367" cy="2141236"/>
           </a:xfrm>
           <a:prstGeom prst="rect">
             <a:avLst/>
@@ -8997,10 +8937,10 @@
       </p:pic>
       <p:pic>
         <p:nvPicPr>
-          <p:cNvPr id="4" name="Picture 3">
-            <a:extLst>
-              <a:ext uri="{FF2B5EF4-FFF2-40B4-BE49-F238E27FC236}">
-                <a16:creationId xmlns:a16="http://schemas.microsoft.com/office/drawing/2014/main" id="{31EFFF37-7AD6-C6C2-E20D-198CFAFD4C7B}"/>
+          <p:cNvPr id="21" name="Picture 20">
+            <a:extLst>
+              <a:ext uri="{FF2B5EF4-FFF2-40B4-BE49-F238E27FC236}">
+                <a16:creationId xmlns:a16="http://schemas.microsoft.com/office/drawing/2014/main" id="{E39B42F8-6471-6D8D-5984-5F8CE4A16777}"/>
               </a:ext>
             </a:extLst>
           </p:cNvPr>
@@ -9017,8 +8957,8 @@
         </p:blipFill>
         <p:spPr>
           <a:xfrm>
-            <a:off x="2534656" y="292110"/>
-            <a:ext cx="4493938" cy="2246969"/>
+            <a:off x="2545492" y="4658060"/>
+            <a:ext cx="4781283" cy="2141236"/>
           </a:xfrm>
           <a:prstGeom prst="rect">
             <a:avLst/>
@@ -9027,10 +8967,10 @@
       </p:pic>
       <p:pic>
         <p:nvPicPr>
-          <p:cNvPr id="8" name="Picture 7">
-            <a:extLst>
-              <a:ext uri="{FF2B5EF4-FFF2-40B4-BE49-F238E27FC236}">
-                <a16:creationId xmlns:a16="http://schemas.microsoft.com/office/drawing/2014/main" id="{9336BABA-3263-308B-55C4-F3117C52DA78}"/>
+          <p:cNvPr id="23" name="Picture 22">
+            <a:extLst>
+              <a:ext uri="{FF2B5EF4-FFF2-40B4-BE49-F238E27FC236}">
+                <a16:creationId xmlns:a16="http://schemas.microsoft.com/office/drawing/2014/main" id="{F1792BBE-77DF-74B2-6FD6-E1646F497718}"/>
               </a:ext>
             </a:extLst>
           </p:cNvPr>
@@ -9047,8 +8987,8 @@
         </p:blipFill>
         <p:spPr>
           <a:xfrm>
-            <a:off x="2534656" y="2464656"/>
-            <a:ext cx="4493938" cy="2246969"/>
+            <a:off x="2545492" y="2522765"/>
+            <a:ext cx="4787367" cy="2141236"/>
           </a:xfrm>
           <a:prstGeom prst="rect">
             <a:avLst/>
@@ -9069,7 +9009,7 @@
         </p:nvSpPr>
         <p:spPr>
           <a:xfrm>
-            <a:off x="2534657" y="290440"/>
+            <a:off x="2534657" y="223205"/>
             <a:ext cx="1013798" cy="261610"/>
           </a:xfrm>
           <a:prstGeom prst="rect">
@@ -9109,7 +9049,7 @@
         </p:nvSpPr>
         <p:spPr>
           <a:xfrm>
-            <a:off x="2534654" y="2474250"/>
+            <a:off x="2534654" y="2407015"/>
             <a:ext cx="1240060" cy="261610"/>
           </a:xfrm>
           <a:prstGeom prst="rect">
@@ -9213,10 +9153,10 @@
       </p:grpSpPr>
       <p:pic>
         <p:nvPicPr>
-          <p:cNvPr id="24" name="Picture 23">
-            <a:extLst>
-              <a:ext uri="{FF2B5EF4-FFF2-40B4-BE49-F238E27FC236}">
-                <a16:creationId xmlns:a16="http://schemas.microsoft.com/office/drawing/2014/main" id="{89E35905-3C3D-C297-B4C9-829CF7CFBB90}"/>
+          <p:cNvPr id="46" name="Picture 45">
+            <a:extLst>
+              <a:ext uri="{FF2B5EF4-FFF2-40B4-BE49-F238E27FC236}">
+                <a16:creationId xmlns:a16="http://schemas.microsoft.com/office/drawing/2014/main" id="{7CC86E34-4C45-09F1-0A80-C360083AF841}"/>
               </a:ext>
             </a:extLst>
           </p:cNvPr>
@@ -9233,8 +9173,8 @@
         </p:blipFill>
         <p:spPr>
           <a:xfrm>
-            <a:off x="1362909" y="36090"/>
-            <a:ext cx="6557220" cy="3278610"/>
+            <a:off x="1679759" y="116703"/>
+            <a:ext cx="6147506" cy="3073753"/>
           </a:xfrm>
           <a:prstGeom prst="rect">
             <a:avLst/>
@@ -9243,10 +9183,10 @@
       </p:pic>
       <p:pic>
         <p:nvPicPr>
-          <p:cNvPr id="18" name="Picture 17">
-            <a:extLst>
-              <a:ext uri="{FF2B5EF4-FFF2-40B4-BE49-F238E27FC236}">
-                <a16:creationId xmlns:a16="http://schemas.microsoft.com/office/drawing/2014/main" id="{DAA82645-09CB-B803-B916-9EB17C399C9B}"/>
+          <p:cNvPr id="34" name="Picture 33">
+            <a:extLst>
+              <a:ext uri="{FF2B5EF4-FFF2-40B4-BE49-F238E27FC236}">
+                <a16:creationId xmlns:a16="http://schemas.microsoft.com/office/drawing/2014/main" id="{61DE3367-21BB-E280-DCFD-2F8C466EA9C6}"/>
               </a:ext>
             </a:extLst>
           </p:cNvPr>
@@ -9257,225 +9197,27 @@
         </p:nvPicPr>
         <p:blipFill>
           <a:blip r:embed="rId3"/>
-          <a:srcRect t="42026" b="33007"/>
+          <a:srcRect t="44178" b="34600"/>
           <a:stretch>
             <a:fillRect/>
           </a:stretch>
         </p:blipFill>
         <p:spPr>
           <a:xfrm>
-            <a:off x="1410755" y="5791514"/>
-            <a:ext cx="6550336" cy="981249"/>
+            <a:off x="1557838" y="5840177"/>
+            <a:ext cx="6378914" cy="835098"/>
           </a:xfrm>
           <a:prstGeom prst="rect">
             <a:avLst/>
           </a:prstGeom>
         </p:spPr>
       </p:pic>
-      <p:sp>
-        <p:nvSpPr>
-          <p:cNvPr id="10" name="TextBox 9">
-            <a:extLst>
-              <a:ext uri="{FF2B5EF4-FFF2-40B4-BE49-F238E27FC236}">
-                <a16:creationId xmlns:a16="http://schemas.microsoft.com/office/drawing/2014/main" id="{F79C25CB-890F-AD31-7380-E2292CEC071D}"/>
-              </a:ext>
-            </a:extLst>
-          </p:cNvPr>
-          <p:cNvSpPr txBox="1"/>
-          <p:nvPr/>
-        </p:nvSpPr>
-        <p:spPr>
-          <a:xfrm>
-            <a:off x="8986641" y="81002"/>
-            <a:ext cx="3651354" cy="369332"/>
-          </a:xfrm>
-          <a:prstGeom prst="rect">
-            <a:avLst/>
-          </a:prstGeom>
-          <a:noFill/>
-        </p:spPr>
-        <p:txBody>
-          <a:bodyPr wrap="square" rtlCol="0">
-            <a:spAutoFit/>
-          </a:bodyPr>
-          <a:lstStyle/>
-          <a:p>
-            <a:r>
-              <a:rPr lang="en-US" dirty="0"/>
-              <a:t>Figure 6 concept (</a:t>
-            </a:r>
-            <a:r>
-              <a:rPr lang="en-US" dirty="0" err="1"/>
-              <a:t>NNdzdt</a:t>
-            </a:r>
-            <a:r>
-              <a:rPr lang="en-US" dirty="0"/>
-              <a:t>)</a:t>
-            </a:r>
-          </a:p>
-        </p:txBody>
-      </p:sp>
-      <p:sp>
-        <p:nvSpPr>
-          <p:cNvPr id="21" name="TextBox 20">
-            <a:extLst>
-              <a:ext uri="{FF2B5EF4-FFF2-40B4-BE49-F238E27FC236}">
-                <a16:creationId xmlns:a16="http://schemas.microsoft.com/office/drawing/2014/main" id="{1D67421B-EBAE-967E-0B04-566DE651F3A1}"/>
-              </a:ext>
-            </a:extLst>
-          </p:cNvPr>
-          <p:cNvSpPr txBox="1"/>
-          <p:nvPr/>
-        </p:nvSpPr>
-        <p:spPr>
-          <a:xfrm>
-            <a:off x="1456841" y="173335"/>
-            <a:ext cx="841709" cy="276999"/>
-          </a:xfrm>
-          <a:prstGeom prst="rect">
-            <a:avLst/>
-          </a:prstGeom>
-          <a:noFill/>
-        </p:spPr>
-        <p:txBody>
-          <a:bodyPr wrap="square" rtlCol="0">
-            <a:spAutoFit/>
-          </a:bodyPr>
-          <a:lstStyle/>
-          <a:p>
-            <a:r>
-              <a:rPr lang="en-US" sz="1200" b="1" dirty="0"/>
-              <a:t>a)</a:t>
-            </a:r>
-          </a:p>
-        </p:txBody>
-      </p:sp>
-      <p:sp>
-        <p:nvSpPr>
-          <p:cNvPr id="22" name="TextBox 21">
-            <a:extLst>
-              <a:ext uri="{FF2B5EF4-FFF2-40B4-BE49-F238E27FC236}">
-                <a16:creationId xmlns:a16="http://schemas.microsoft.com/office/drawing/2014/main" id="{6E62F884-791D-56BE-79C6-CF77C4B9FD76}"/>
-              </a:ext>
-            </a:extLst>
-          </p:cNvPr>
-          <p:cNvSpPr txBox="1"/>
-          <p:nvPr/>
-        </p:nvSpPr>
-        <p:spPr>
-          <a:xfrm>
-            <a:off x="1472618" y="3227553"/>
-            <a:ext cx="1013798" cy="276999"/>
-          </a:xfrm>
-          <a:prstGeom prst="rect">
-            <a:avLst/>
-          </a:prstGeom>
-          <a:noFill/>
-        </p:spPr>
-        <p:txBody>
-          <a:bodyPr wrap="square" rtlCol="0">
-            <a:spAutoFit/>
-          </a:bodyPr>
-          <a:lstStyle/>
-          <a:p>
-            <a:r>
-              <a:rPr lang="en-US" sz="1200" b="1" dirty="0"/>
-              <a:t>b) </a:t>
-            </a:r>
-            <a:r>
-              <a:rPr lang="en-US" sz="1200" dirty="0"/>
-              <a:t>SINDy</a:t>
-            </a:r>
-            <a:endParaRPr lang="en-US" sz="1200" b="1" dirty="0"/>
-          </a:p>
-        </p:txBody>
-      </p:sp>
-      <p:sp>
-        <p:nvSpPr>
-          <p:cNvPr id="31" name="TextBox 30">
-            <a:extLst>
-              <a:ext uri="{FF2B5EF4-FFF2-40B4-BE49-F238E27FC236}">
-                <a16:creationId xmlns:a16="http://schemas.microsoft.com/office/drawing/2014/main" id="{7E52A0E3-CDEA-4573-3335-AA9D6E0AC4D5}"/>
-              </a:ext>
-            </a:extLst>
-          </p:cNvPr>
-          <p:cNvSpPr txBox="1"/>
-          <p:nvPr/>
-        </p:nvSpPr>
-        <p:spPr>
-          <a:xfrm>
-            <a:off x="1456840" y="4495693"/>
-            <a:ext cx="1358839" cy="276999"/>
-          </a:xfrm>
-          <a:prstGeom prst="rect">
-            <a:avLst/>
-          </a:prstGeom>
-          <a:noFill/>
-        </p:spPr>
-        <p:txBody>
-          <a:bodyPr wrap="square" rtlCol="0">
-            <a:spAutoFit/>
-          </a:bodyPr>
-          <a:lstStyle/>
-          <a:p>
-            <a:r>
-              <a:rPr lang="en-US" sz="1200" b="1" dirty="0"/>
-              <a:t>c) </a:t>
-            </a:r>
-            <a:r>
-              <a:rPr lang="en-US" sz="1200" dirty="0"/>
-              <a:t>NN-derivative</a:t>
-            </a:r>
-            <a:endParaRPr lang="en-US" sz="1200" b="1" dirty="0"/>
-          </a:p>
-        </p:txBody>
-      </p:sp>
-      <p:sp>
-        <p:nvSpPr>
-          <p:cNvPr id="32" name="TextBox 31">
-            <a:extLst>
-              <a:ext uri="{FF2B5EF4-FFF2-40B4-BE49-F238E27FC236}">
-                <a16:creationId xmlns:a16="http://schemas.microsoft.com/office/drawing/2014/main" id="{3146527C-BE20-5AFF-EBFD-EBAF34970DAA}"/>
-              </a:ext>
-            </a:extLst>
-          </p:cNvPr>
-          <p:cNvSpPr txBox="1"/>
-          <p:nvPr/>
-        </p:nvSpPr>
-        <p:spPr>
-          <a:xfrm>
-            <a:off x="1456841" y="5566333"/>
-            <a:ext cx="841709" cy="276999"/>
-          </a:xfrm>
-          <a:prstGeom prst="rect">
-            <a:avLst/>
-          </a:prstGeom>
-          <a:noFill/>
-        </p:spPr>
-        <p:txBody>
-          <a:bodyPr wrap="square" rtlCol="0">
-            <a:spAutoFit/>
-          </a:bodyPr>
-          <a:lstStyle/>
-          <a:p>
-            <a:r>
-              <a:rPr lang="en-US" sz="1200" b="1" dirty="0"/>
-              <a:t>d) </a:t>
-            </a:r>
-            <a:r>
-              <a:rPr lang="en-US" sz="1200" dirty="0"/>
-              <a:t>AR</a:t>
-            </a:r>
-            <a:endParaRPr lang="en-US" sz="1200" b="1" dirty="0"/>
-          </a:p>
-        </p:txBody>
-      </p:sp>
       <p:pic>
         <p:nvPicPr>
-          <p:cNvPr id="7" name="Picture 6">
-            <a:extLst>
-              <a:ext uri="{FF2B5EF4-FFF2-40B4-BE49-F238E27FC236}">
-                <a16:creationId xmlns:a16="http://schemas.microsoft.com/office/drawing/2014/main" id="{69E37D20-54FD-AE17-F7A6-585A0C8548EF}"/>
+          <p:cNvPr id="23" name="Picture 22">
+            <a:extLst>
+              <a:ext uri="{FF2B5EF4-FFF2-40B4-BE49-F238E27FC236}">
+                <a16:creationId xmlns:a16="http://schemas.microsoft.com/office/drawing/2014/main" id="{D57AE496-7412-03CB-F2D7-300E12E1C92F}"/>
               </a:ext>
             </a:extLst>
           </p:cNvPr>
@@ -9486,15 +9228,15 @@
         </p:nvPicPr>
         <p:blipFill>
           <a:blip r:embed="rId4"/>
-          <a:srcRect t="41998" b="36391"/>
+          <a:srcRect t="34951" b="35450"/>
           <a:stretch>
             <a:fillRect/>
           </a:stretch>
         </p:blipFill>
         <p:spPr>
           <a:xfrm>
-            <a:off x="1419874" y="4718180"/>
-            <a:ext cx="6541216" cy="848153"/>
+            <a:off x="1557838" y="3338479"/>
+            <a:ext cx="6378914" cy="1132907"/>
           </a:xfrm>
           <a:prstGeom prst="rect">
             <a:avLst/>
@@ -9503,10 +9245,10 @@
       </p:pic>
       <p:sp>
         <p:nvSpPr>
-          <p:cNvPr id="12" name="TextBox 11">
-            <a:extLst>
-              <a:ext uri="{FF2B5EF4-FFF2-40B4-BE49-F238E27FC236}">
-                <a16:creationId xmlns:a16="http://schemas.microsoft.com/office/drawing/2014/main" id="{5D0A600B-C457-F588-64FE-38DE6B29BD22}"/>
+          <p:cNvPr id="10" name="TextBox 9">
+            <a:extLst>
+              <a:ext uri="{FF2B5EF4-FFF2-40B4-BE49-F238E27FC236}">
+                <a16:creationId xmlns:a16="http://schemas.microsoft.com/office/drawing/2014/main" id="{F79C25CB-890F-AD31-7380-E2292CEC071D}"/>
               </a:ext>
             </a:extLst>
           </p:cNvPr>
@@ -9515,8 +9257,8 @@
         </p:nvSpPr>
         <p:spPr>
           <a:xfrm>
-            <a:off x="6954792" y="6578723"/>
-            <a:ext cx="704486" cy="261610"/>
+            <a:off x="8986641" y="81002"/>
+            <a:ext cx="3651354" cy="369332"/>
           </a:xfrm>
           <a:prstGeom prst="rect">
             <a:avLst/>
@@ -9530,18 +9272,26 @@
           <a:lstStyle/>
           <a:p>
             <a:r>
-              <a:rPr lang="en-US" sz="1050" i="1" dirty="0"/>
-              <a:t>P5</a:t>
-            </a:r>
-          </a:p>
-        </p:txBody>
-      </p:sp>
-      <p:sp>
-        <p:nvSpPr>
-          <p:cNvPr id="15" name="TextBox 14">
-            <a:extLst>
-              <a:ext uri="{FF2B5EF4-FFF2-40B4-BE49-F238E27FC236}">
-                <a16:creationId xmlns:a16="http://schemas.microsoft.com/office/drawing/2014/main" id="{9BBDC054-2ADA-A82F-B1EB-27537093A0E1}"/>
+              <a:rPr lang="en-US" dirty="0"/>
+              <a:t>Figure 6 concept (</a:t>
+            </a:r>
+            <a:r>
+              <a:rPr lang="en-US" dirty="0" err="1"/>
+              <a:t>NNdzdt</a:t>
+            </a:r>
+            <a:r>
+              <a:rPr lang="en-US" dirty="0"/>
+              <a:t>)</a:t>
+            </a:r>
+          </a:p>
+        </p:txBody>
+      </p:sp>
+      <p:sp>
+        <p:nvSpPr>
+          <p:cNvPr id="21" name="TextBox 20">
+            <a:extLst>
+              <a:ext uri="{FF2B5EF4-FFF2-40B4-BE49-F238E27FC236}">
+                <a16:creationId xmlns:a16="http://schemas.microsoft.com/office/drawing/2014/main" id="{1D67421B-EBAE-967E-0B04-566DE651F3A1}"/>
               </a:ext>
             </a:extLst>
           </p:cNvPr>
@@ -9550,8 +9300,8 @@
         </p:nvSpPr>
         <p:spPr>
           <a:xfrm>
-            <a:off x="2499926" y="6581860"/>
-            <a:ext cx="704486" cy="261610"/>
+            <a:off x="1456841" y="173335"/>
+            <a:ext cx="841709" cy="276999"/>
           </a:xfrm>
           <a:prstGeom prst="rect">
             <a:avLst/>
@@ -9565,18 +9315,18 @@
           <a:lstStyle/>
           <a:p>
             <a:r>
-              <a:rPr lang="en-US" sz="1050" i="1" dirty="0"/>
-              <a:t>P25</a:t>
-            </a:r>
-          </a:p>
-        </p:txBody>
-      </p:sp>
-      <p:sp>
-        <p:nvSpPr>
-          <p:cNvPr id="17" name="TextBox 16">
-            <a:extLst>
-              <a:ext uri="{FF2B5EF4-FFF2-40B4-BE49-F238E27FC236}">
-                <a16:creationId xmlns:a16="http://schemas.microsoft.com/office/drawing/2014/main" id="{22965D34-05F5-0730-0688-4F6D29F23B64}"/>
+              <a:rPr lang="en-US" sz="1200" b="1" dirty="0"/>
+              <a:t>a)</a:t>
+            </a:r>
+          </a:p>
+        </p:txBody>
+      </p:sp>
+      <p:sp>
+        <p:nvSpPr>
+          <p:cNvPr id="22" name="TextBox 21">
+            <a:extLst>
+              <a:ext uri="{FF2B5EF4-FFF2-40B4-BE49-F238E27FC236}">
+                <a16:creationId xmlns:a16="http://schemas.microsoft.com/office/drawing/2014/main" id="{6E62F884-791D-56BE-79C6-CF77C4B9FD76}"/>
               </a:ext>
             </a:extLst>
           </p:cNvPr>
@@ -9585,8 +9335,8 @@
         </p:nvSpPr>
         <p:spPr>
           <a:xfrm>
-            <a:off x="5621327" y="6601309"/>
-            <a:ext cx="459331" cy="261610"/>
+            <a:off x="1472618" y="3227553"/>
+            <a:ext cx="1013798" cy="276999"/>
           </a:xfrm>
           <a:prstGeom prst="rect">
             <a:avLst/>
@@ -9600,18 +9350,54 @@
           <a:lstStyle/>
           <a:p>
             <a:r>
-              <a:rPr lang="en-US" sz="1050" i="1" dirty="0"/>
-              <a:t>P50</a:t>
-            </a:r>
-          </a:p>
-        </p:txBody>
-      </p:sp>
-      <p:sp>
-        <p:nvSpPr>
-          <p:cNvPr id="29" name="TextBox 28">
-            <a:extLst>
-              <a:ext uri="{FF2B5EF4-FFF2-40B4-BE49-F238E27FC236}">
-                <a16:creationId xmlns:a16="http://schemas.microsoft.com/office/drawing/2014/main" id="{C44F9334-2536-7221-76AD-4DD100651570}"/>
+              <a:rPr lang="en-US" sz="1200" b="1" dirty="0"/>
+              <a:t>b) </a:t>
+            </a:r>
+            <a:r>
+              <a:rPr lang="en-US" sz="1200" dirty="0"/>
+              <a:t>SINDy</a:t>
+            </a:r>
+            <a:endParaRPr lang="en-US" sz="1200" b="1" dirty="0"/>
+          </a:p>
+        </p:txBody>
+      </p:sp>
+      <p:pic>
+        <p:nvPicPr>
+          <p:cNvPr id="26" name="Picture 25">
+            <a:extLst>
+              <a:ext uri="{FF2B5EF4-FFF2-40B4-BE49-F238E27FC236}">
+                <a16:creationId xmlns:a16="http://schemas.microsoft.com/office/drawing/2014/main" id="{F516FF88-692E-0B6A-E682-80D7C2828F03}"/>
+              </a:ext>
+            </a:extLst>
+          </p:cNvPr>
+          <p:cNvPicPr>
+            <a:picLocks noChangeAspect="1"/>
+          </p:cNvPicPr>
+          <p:nvPr/>
+        </p:nvPicPr>
+        <p:blipFill>
+          <a:blip r:embed="rId5"/>
+          <a:srcRect t="44614" b="35346"/>
+          <a:stretch>
+            <a:fillRect/>
+          </a:stretch>
+        </p:blipFill>
+        <p:spPr>
+          <a:xfrm>
+            <a:off x="1557838" y="4785653"/>
+            <a:ext cx="6378914" cy="766998"/>
+          </a:xfrm>
+          <a:prstGeom prst="rect">
+            <a:avLst/>
+          </a:prstGeom>
+        </p:spPr>
+      </p:pic>
+      <p:sp>
+        <p:nvSpPr>
+          <p:cNvPr id="31" name="TextBox 30">
+            <a:extLst>
+              <a:ext uri="{FF2B5EF4-FFF2-40B4-BE49-F238E27FC236}">
+                <a16:creationId xmlns:a16="http://schemas.microsoft.com/office/drawing/2014/main" id="{7E52A0E3-CDEA-4573-3335-AA9D6E0AC4D5}"/>
               </a:ext>
             </a:extLst>
           </p:cNvPr>
@@ -9620,8 +9406,8 @@
         </p:nvSpPr>
         <p:spPr>
           <a:xfrm>
-            <a:off x="2852169" y="6589250"/>
-            <a:ext cx="704486" cy="261610"/>
+            <a:off x="1456840" y="4495693"/>
+            <a:ext cx="1358839" cy="276999"/>
           </a:xfrm>
           <a:prstGeom prst="rect">
             <a:avLst/>
@@ -9635,214 +9421,57 @@
           <a:lstStyle/>
           <a:p>
             <a:r>
-              <a:rPr lang="en-US" sz="1050" i="1" dirty="0"/>
-              <a:t>P75</a:t>
-            </a:r>
-          </a:p>
-        </p:txBody>
-      </p:sp>
-      <p:grpSp>
-        <p:nvGrpSpPr>
-          <p:cNvPr id="6" name="Group 5">
-            <a:extLst>
-              <a:ext uri="{FF2B5EF4-FFF2-40B4-BE49-F238E27FC236}">
-                <a16:creationId xmlns:a16="http://schemas.microsoft.com/office/drawing/2014/main" id="{68DB1792-4BAE-2038-EC19-764BCEE5B5F8}"/>
-              </a:ext>
-            </a:extLst>
-          </p:cNvPr>
-          <p:cNvGrpSpPr/>
+              <a:rPr lang="en-US" sz="1200" b="1" dirty="0"/>
+              <a:t>c) </a:t>
+            </a:r>
+            <a:r>
+              <a:rPr lang="en-US" sz="1200" dirty="0"/>
+              <a:t>NN-derivative</a:t>
+            </a:r>
+            <a:endParaRPr lang="en-US" sz="1200" b="1" dirty="0"/>
+          </a:p>
+        </p:txBody>
+      </p:sp>
+      <p:sp>
+        <p:nvSpPr>
+          <p:cNvPr id="32" name="TextBox 31">
+            <a:extLst>
+              <a:ext uri="{FF2B5EF4-FFF2-40B4-BE49-F238E27FC236}">
+                <a16:creationId xmlns:a16="http://schemas.microsoft.com/office/drawing/2014/main" id="{3146527C-BE20-5AFF-EBFD-EBAF34970DAA}"/>
+              </a:ext>
+            </a:extLst>
+          </p:cNvPr>
+          <p:cNvSpPr txBox="1"/>
           <p:nvPr/>
-        </p:nvGrpSpPr>
-        <p:grpSpPr>
+        </p:nvSpPr>
+        <p:spPr>
           <a:xfrm>
-            <a:off x="1419874" y="3227553"/>
-            <a:ext cx="6541216" cy="3398903"/>
-            <a:chOff x="1419874" y="3121223"/>
-            <a:chExt cx="6541216" cy="3398903"/>
-          </a:xfrm>
-        </p:grpSpPr>
-        <p:pic>
-          <p:nvPicPr>
-            <p:cNvPr id="5" name="Picture 4">
-              <a:extLst>
-                <a:ext uri="{FF2B5EF4-FFF2-40B4-BE49-F238E27FC236}">
-                  <a16:creationId xmlns:a16="http://schemas.microsoft.com/office/drawing/2014/main" id="{6D16E929-6A65-B67E-D260-12BDE50EF2D8}"/>
-                </a:ext>
-              </a:extLst>
-            </p:cNvPr>
-            <p:cNvPicPr>
-              <a:picLocks noChangeAspect="1"/>
-            </p:cNvPicPr>
-            <p:nvPr/>
-          </p:nvPicPr>
-          <p:blipFill>
-            <a:blip r:embed="rId5"/>
-            <a:srcRect t="32153" b="35673"/>
-            <a:stretch>
-              <a:fillRect/>
-            </a:stretch>
-          </p:blipFill>
-          <p:spPr>
-            <a:xfrm>
-              <a:off x="1419874" y="3121223"/>
-              <a:ext cx="6541216" cy="1262754"/>
-            </a:xfrm>
-            <a:prstGeom prst="rect">
-              <a:avLst/>
-            </a:prstGeom>
-          </p:spPr>
-        </p:pic>
-        <p:sp>
-          <p:nvSpPr>
-            <p:cNvPr id="19" name="Rectangle 18">
-              <a:extLst>
-                <a:ext uri="{FF2B5EF4-FFF2-40B4-BE49-F238E27FC236}">
-                  <a16:creationId xmlns:a16="http://schemas.microsoft.com/office/drawing/2014/main" id="{320DCEEB-7A41-8B19-9225-4A2FF4C76745}"/>
-                </a:ext>
-              </a:extLst>
-            </p:cNvPr>
-            <p:cNvSpPr/>
-            <p:nvPr/>
-          </p:nvSpPr>
-          <p:spPr>
-            <a:xfrm>
-              <a:off x="2769961" y="3665285"/>
-              <a:ext cx="45719" cy="688239"/>
-            </a:xfrm>
-            <a:prstGeom prst="rect">
-              <a:avLst/>
-            </a:prstGeom>
-            <a:noFill/>
-            <a:ln>
-              <a:solidFill>
-                <a:schemeClr val="bg1"/>
-              </a:solidFill>
-            </a:ln>
-          </p:spPr>
-          <p:style>
-            <a:lnRef idx="2">
-              <a:schemeClr val="accent2"/>
-            </a:lnRef>
-            <a:fillRef idx="1">
-              <a:schemeClr val="lt1"/>
-            </a:fillRef>
-            <a:effectRef idx="0">
-              <a:schemeClr val="accent2"/>
-            </a:effectRef>
-            <a:fontRef idx="minor">
-              <a:schemeClr val="dk1"/>
-            </a:fontRef>
-          </p:style>
-          <p:txBody>
-            <a:bodyPr rtlCol="0" anchor="ctr"/>
-            <a:lstStyle/>
-            <a:p>
-              <a:pPr algn="ctr"/>
-              <a:endParaRPr lang="en-US"/>
-            </a:p>
-          </p:txBody>
-        </p:sp>
-        <p:sp>
-          <p:nvSpPr>
-            <p:cNvPr id="37" name="Rectangle 36">
-              <a:extLst>
-                <a:ext uri="{FF2B5EF4-FFF2-40B4-BE49-F238E27FC236}">
-                  <a16:creationId xmlns:a16="http://schemas.microsoft.com/office/drawing/2014/main" id="{11E8E405-1451-24BB-DC99-8A019728D276}"/>
-                </a:ext>
-              </a:extLst>
-            </p:cNvPr>
-            <p:cNvSpPr/>
-            <p:nvPr/>
-          </p:nvSpPr>
-          <p:spPr>
-            <a:xfrm>
-              <a:off x="2765704" y="4737079"/>
-              <a:ext cx="54232" cy="693937"/>
-            </a:xfrm>
-            <a:prstGeom prst="rect">
-              <a:avLst/>
-            </a:prstGeom>
-            <a:noFill/>
-            <a:ln>
-              <a:solidFill>
-                <a:schemeClr val="bg1"/>
-              </a:solidFill>
-            </a:ln>
-          </p:spPr>
-          <p:style>
-            <a:lnRef idx="2">
-              <a:schemeClr val="accent2"/>
-            </a:lnRef>
-            <a:fillRef idx="1">
-              <a:schemeClr val="lt1"/>
-            </a:fillRef>
-            <a:effectRef idx="0">
-              <a:schemeClr val="accent2"/>
-            </a:effectRef>
-            <a:fontRef idx="minor">
-              <a:schemeClr val="dk1"/>
-            </a:fontRef>
-          </p:style>
-          <p:txBody>
-            <a:bodyPr rtlCol="0" anchor="ctr"/>
-            <a:lstStyle/>
-            <a:p>
-              <a:pPr algn="ctr"/>
-              <a:endParaRPr lang="en-US"/>
-            </a:p>
-          </p:txBody>
-        </p:sp>
-        <p:sp>
-          <p:nvSpPr>
-            <p:cNvPr id="38" name="Rectangle 37">
-              <a:extLst>
-                <a:ext uri="{FF2B5EF4-FFF2-40B4-BE49-F238E27FC236}">
-                  <a16:creationId xmlns:a16="http://schemas.microsoft.com/office/drawing/2014/main" id="{B5D93E19-6A82-FE05-F233-AE6A193CD1F8}"/>
-                </a:ext>
-              </a:extLst>
-            </p:cNvPr>
-            <p:cNvSpPr/>
-            <p:nvPr/>
-          </p:nvSpPr>
-          <p:spPr>
-            <a:xfrm>
-              <a:off x="2765704" y="5826189"/>
-              <a:ext cx="54232" cy="693937"/>
-            </a:xfrm>
-            <a:prstGeom prst="rect">
-              <a:avLst/>
-            </a:prstGeom>
-            <a:noFill/>
-            <a:ln>
-              <a:solidFill>
-                <a:schemeClr val="bg1"/>
-              </a:solidFill>
-            </a:ln>
-          </p:spPr>
-          <p:style>
-            <a:lnRef idx="2">
-              <a:schemeClr val="accent2"/>
-            </a:lnRef>
-            <a:fillRef idx="1">
-              <a:schemeClr val="lt1"/>
-            </a:fillRef>
-            <a:effectRef idx="0">
-              <a:schemeClr val="accent2"/>
-            </a:effectRef>
-            <a:fontRef idx="minor">
-              <a:schemeClr val="dk1"/>
-            </a:fontRef>
-          </p:style>
-          <p:txBody>
-            <a:bodyPr rtlCol="0" anchor="ctr"/>
-            <a:lstStyle/>
-            <a:p>
-              <a:pPr algn="ctr"/>
-              <a:endParaRPr lang="en-US"/>
-            </a:p>
-          </p:txBody>
-        </p:sp>
-      </p:grpSp>
+            <a:off x="1456841" y="5566333"/>
+            <a:ext cx="841709" cy="276999"/>
+          </a:xfrm>
+          <a:prstGeom prst="rect">
+            <a:avLst/>
+          </a:prstGeom>
+          <a:noFill/>
+        </p:spPr>
+        <p:txBody>
+          <a:bodyPr wrap="square" rtlCol="0">
+            <a:spAutoFit/>
+          </a:bodyPr>
+          <a:lstStyle/>
+          <a:p>
+            <a:r>
+              <a:rPr lang="en-US" sz="1200" b="1" dirty="0"/>
+              <a:t>d) </a:t>
+            </a:r>
+            <a:r>
+              <a:rPr lang="en-US" sz="1200" dirty="0"/>
+              <a:t>AR</a:t>
+            </a:r>
+            <a:endParaRPr lang="en-US" sz="1200" b="1" dirty="0"/>
+          </a:p>
+        </p:txBody>
+      </p:sp>
       <p:sp>
         <p:nvSpPr>
           <p:cNvPr id="2" name="Rectangle 1">
@@ -9940,7 +9569,7 @@
         </p:nvSpPr>
         <p:spPr>
           <a:xfrm>
-            <a:off x="2966262" y="3771615"/>
+            <a:off x="2543122" y="3713931"/>
             <a:ext cx="45719" cy="2872758"/>
           </a:xfrm>
           <a:prstGeom prst="rect">
@@ -9994,7 +9623,7 @@
         </p:nvSpPr>
         <p:spPr>
           <a:xfrm>
-            <a:off x="5805273" y="3753998"/>
+            <a:off x="6395110" y="3713931"/>
             <a:ext cx="45719" cy="2872758"/>
           </a:xfrm>
           <a:prstGeom prst="rect">
@@ -10036,10 +9665,64 @@
       </p:sp>
       <p:sp>
         <p:nvSpPr>
-          <p:cNvPr id="13" name="TextBox 12">
-            <a:extLst>
-              <a:ext uri="{FF2B5EF4-FFF2-40B4-BE49-F238E27FC236}">
-                <a16:creationId xmlns:a16="http://schemas.microsoft.com/office/drawing/2014/main" id="{32F58C06-E888-9C20-0C72-600BEAF8706C}"/>
+          <p:cNvPr id="40" name="Rectangle 39">
+            <a:extLst>
+              <a:ext uri="{FF2B5EF4-FFF2-40B4-BE49-F238E27FC236}">
+                <a16:creationId xmlns:a16="http://schemas.microsoft.com/office/drawing/2014/main" id="{2D01F62C-7E88-998A-27A1-6610C222D1BC}"/>
+              </a:ext>
+            </a:extLst>
+          </p:cNvPr>
+          <p:cNvSpPr/>
+          <p:nvPr/>
+        </p:nvSpPr>
+        <p:spPr>
+          <a:xfrm>
+            <a:off x="7828066" y="3719023"/>
+            <a:ext cx="45719" cy="2872758"/>
+          </a:xfrm>
+          <a:prstGeom prst="rect">
+            <a:avLst/>
+          </a:prstGeom>
+          <a:noFill/>
+          <a:ln>
+            <a:solidFill>
+              <a:schemeClr val="bg1"/>
+            </a:solidFill>
+          </a:ln>
+        </p:spPr>
+        <p:style>
+          <a:lnRef idx="2">
+            <a:schemeClr val="accent2"/>
+          </a:lnRef>
+          <a:fillRef idx="1">
+            <a:schemeClr val="lt1"/>
+          </a:fillRef>
+          <a:effectRef idx="0">
+            <a:schemeClr val="accent2"/>
+          </a:effectRef>
+          <a:fontRef idx="minor">
+            <a:schemeClr val="dk1"/>
+          </a:fontRef>
+        </p:style>
+        <p:txBody>
+          <a:bodyPr rtlCol="0" anchor="ctr"/>
+          <a:lstStyle/>
+          <a:p>
+            <a:pPr algn="ctr"/>
+            <a:endParaRPr lang="en-US" dirty="0"/>
+          </a:p>
+          <a:p>
+            <a:pPr algn="ctr"/>
+            <a:endParaRPr lang="en-US" dirty="0"/>
+          </a:p>
+        </p:txBody>
+      </p:sp>
+      <p:sp>
+        <p:nvSpPr>
+          <p:cNvPr id="47" name="TextBox 46">
+            <a:extLst>
+              <a:ext uri="{FF2B5EF4-FFF2-40B4-BE49-F238E27FC236}">
+                <a16:creationId xmlns:a16="http://schemas.microsoft.com/office/drawing/2014/main" id="{1C0B7C22-3437-44CB-F39F-54F47297C411}"/>
               </a:ext>
             </a:extLst>
           </p:cNvPr>
@@ -10048,8 +9731,8 @@
         </p:nvSpPr>
         <p:spPr>
           <a:xfrm>
-            <a:off x="1472618" y="3347587"/>
-            <a:ext cx="1240060" cy="276999"/>
+            <a:off x="7655583" y="6512590"/>
+            <a:ext cx="343364" cy="261610"/>
           </a:xfrm>
           <a:prstGeom prst="rect">
             <a:avLst/>
@@ -10057,194 +9740,177 @@
           <a:noFill/>
         </p:spPr>
         <p:txBody>
-          <a:bodyPr wrap="square" rtlCol="0">
+          <a:bodyPr wrap="none" rtlCol="0">
             <a:spAutoFit/>
           </a:bodyPr>
           <a:lstStyle/>
           <a:p>
             <a:r>
-              <a:rPr lang="en-US" sz="1200" b="1" dirty="0"/>
-              <a:t>b) </a:t>
-            </a:r>
-            <a:r>
-              <a:rPr lang="en-US" sz="1200" dirty="0"/>
-              <a:t>SINDy</a:t>
-            </a:r>
-            <a:endParaRPr lang="en-US" sz="1200" b="1" dirty="0"/>
-          </a:p>
-        </p:txBody>
-      </p:sp>
-      <p:grpSp>
-        <p:nvGrpSpPr>
-          <p:cNvPr id="3" name="Group 2">
-            <a:extLst>
-              <a:ext uri="{FF2B5EF4-FFF2-40B4-BE49-F238E27FC236}">
-                <a16:creationId xmlns:a16="http://schemas.microsoft.com/office/drawing/2014/main" id="{D825DA9F-C07D-7F75-9948-3D1507F1FD02}"/>
-              </a:ext>
-            </a:extLst>
-          </p:cNvPr>
-          <p:cNvGrpSpPr/>
+              <a:rPr lang="en-US" sz="1100" i="1" dirty="0"/>
+              <a:t>P5</a:t>
+            </a:r>
+          </a:p>
+        </p:txBody>
+      </p:sp>
+      <p:sp>
+        <p:nvSpPr>
+          <p:cNvPr id="48" name="TextBox 47">
+            <a:extLst>
+              <a:ext uri="{FF2B5EF4-FFF2-40B4-BE49-F238E27FC236}">
+                <a16:creationId xmlns:a16="http://schemas.microsoft.com/office/drawing/2014/main" id="{901965E7-AB67-A926-DFA1-98035159C7C1}"/>
+              </a:ext>
+            </a:extLst>
+          </p:cNvPr>
+          <p:cNvSpPr txBox="1"/>
           <p:nvPr/>
-        </p:nvGrpSpPr>
-        <p:grpSpPr>
+        </p:nvSpPr>
+        <p:spPr>
           <a:xfrm>
-            <a:off x="7084684" y="3746467"/>
-            <a:ext cx="54232" cy="2854842"/>
-            <a:chOff x="6646426" y="3652754"/>
-            <a:chExt cx="54232" cy="2854842"/>
-          </a:xfrm>
-        </p:grpSpPr>
-        <p:sp>
-          <p:nvSpPr>
-            <p:cNvPr id="14" name="Rectangle 13">
-              <a:extLst>
-                <a:ext uri="{FF2B5EF4-FFF2-40B4-BE49-F238E27FC236}">
-                  <a16:creationId xmlns:a16="http://schemas.microsoft.com/office/drawing/2014/main" id="{82416DC7-C611-E1EE-8FE3-4FEDEC06BB01}"/>
-                </a:ext>
-              </a:extLst>
-            </p:cNvPr>
-            <p:cNvSpPr/>
-            <p:nvPr/>
-          </p:nvSpPr>
-          <p:spPr>
-            <a:xfrm>
-              <a:off x="6646427" y="3652754"/>
-              <a:ext cx="45719" cy="730539"/>
-            </a:xfrm>
-            <a:prstGeom prst="rect">
-              <a:avLst/>
-            </a:prstGeom>
-            <a:noFill/>
-            <a:ln>
-              <a:solidFill>
-                <a:schemeClr val="bg1"/>
-              </a:solidFill>
-            </a:ln>
-          </p:spPr>
-          <p:style>
-            <a:lnRef idx="2">
-              <a:schemeClr val="accent2"/>
-            </a:lnRef>
-            <a:fillRef idx="1">
-              <a:schemeClr val="lt1"/>
-            </a:fillRef>
-            <a:effectRef idx="0">
-              <a:schemeClr val="accent2"/>
-            </a:effectRef>
-            <a:fontRef idx="minor">
-              <a:schemeClr val="dk1"/>
-            </a:fontRef>
-          </p:style>
-          <p:txBody>
-            <a:bodyPr rtlCol="0" anchor="ctr"/>
-            <a:lstStyle/>
-            <a:p>
-              <a:pPr algn="ctr"/>
-              <a:endParaRPr lang="en-US"/>
-            </a:p>
-          </p:txBody>
-        </p:sp>
-        <p:sp>
-          <p:nvSpPr>
-            <p:cNvPr id="33" name="Rectangle 32">
-              <a:extLst>
-                <a:ext uri="{FF2B5EF4-FFF2-40B4-BE49-F238E27FC236}">
-                  <a16:creationId xmlns:a16="http://schemas.microsoft.com/office/drawing/2014/main" id="{90E05789-5089-0136-B22F-3B8047594817}"/>
-                </a:ext>
-              </a:extLst>
-            </p:cNvPr>
-            <p:cNvSpPr/>
-            <p:nvPr/>
-          </p:nvSpPr>
-          <p:spPr>
-            <a:xfrm>
-              <a:off x="6646427" y="4782548"/>
-              <a:ext cx="45719" cy="730539"/>
-            </a:xfrm>
-            <a:prstGeom prst="rect">
-              <a:avLst/>
-            </a:prstGeom>
-            <a:noFill/>
-            <a:ln>
-              <a:solidFill>
-                <a:schemeClr val="bg1"/>
-              </a:solidFill>
-            </a:ln>
-          </p:spPr>
-          <p:style>
-            <a:lnRef idx="2">
-              <a:schemeClr val="accent2"/>
-            </a:lnRef>
-            <a:fillRef idx="1">
-              <a:schemeClr val="lt1"/>
-            </a:fillRef>
-            <a:effectRef idx="0">
-              <a:schemeClr val="accent2"/>
-            </a:effectRef>
-            <a:fontRef idx="minor">
-              <a:schemeClr val="dk1"/>
-            </a:fontRef>
-          </p:style>
-          <p:txBody>
-            <a:bodyPr rtlCol="0" anchor="ctr"/>
-            <a:lstStyle/>
-            <a:p>
-              <a:pPr algn="ctr"/>
-              <a:endParaRPr lang="en-US"/>
-            </a:p>
-          </p:txBody>
-        </p:sp>
-        <p:sp>
-          <p:nvSpPr>
-            <p:cNvPr id="35" name="Rectangle 34">
-              <a:extLst>
-                <a:ext uri="{FF2B5EF4-FFF2-40B4-BE49-F238E27FC236}">
-                  <a16:creationId xmlns:a16="http://schemas.microsoft.com/office/drawing/2014/main" id="{05F29C22-400C-84DC-A7BF-3D840740C484}"/>
-                </a:ext>
-              </a:extLst>
-            </p:cNvPr>
-            <p:cNvSpPr/>
-            <p:nvPr/>
-          </p:nvSpPr>
-          <p:spPr>
-            <a:xfrm>
-              <a:off x="6646426" y="5813659"/>
-              <a:ext cx="54232" cy="693937"/>
-            </a:xfrm>
-            <a:prstGeom prst="rect">
-              <a:avLst/>
-            </a:prstGeom>
-            <a:noFill/>
-            <a:ln>
-              <a:solidFill>
-                <a:schemeClr val="bg1"/>
-              </a:solidFill>
-            </a:ln>
-          </p:spPr>
-          <p:style>
-            <a:lnRef idx="2">
-              <a:schemeClr val="accent2"/>
-            </a:lnRef>
-            <a:fillRef idx="1">
-              <a:schemeClr val="lt1"/>
-            </a:fillRef>
-            <a:effectRef idx="0">
-              <a:schemeClr val="accent2"/>
-            </a:effectRef>
-            <a:fontRef idx="minor">
-              <a:schemeClr val="dk1"/>
-            </a:fontRef>
-          </p:style>
-          <p:txBody>
-            <a:bodyPr rtlCol="0" anchor="ctr"/>
-            <a:lstStyle/>
-            <a:p>
-              <a:pPr algn="ctr"/>
-              <a:endParaRPr lang="en-US"/>
-            </a:p>
-          </p:txBody>
-        </p:sp>
-      </p:grpSp>
+            <a:off x="2356629" y="6480191"/>
+            <a:ext cx="418704" cy="261610"/>
+          </a:xfrm>
+          <a:prstGeom prst="rect">
+            <a:avLst/>
+          </a:prstGeom>
+          <a:noFill/>
+        </p:spPr>
+        <p:txBody>
+          <a:bodyPr wrap="none" rtlCol="0">
+            <a:spAutoFit/>
+          </a:bodyPr>
+          <a:lstStyle/>
+          <a:p>
+            <a:r>
+              <a:rPr lang="en-US" sz="1100" i="1" dirty="0"/>
+              <a:t>P50</a:t>
+            </a:r>
+          </a:p>
+        </p:txBody>
+      </p:sp>
+      <p:sp>
+        <p:nvSpPr>
+          <p:cNvPr id="49" name="TextBox 48">
+            <a:extLst>
+              <a:ext uri="{FF2B5EF4-FFF2-40B4-BE49-F238E27FC236}">
+                <a16:creationId xmlns:a16="http://schemas.microsoft.com/office/drawing/2014/main" id="{61E1D6EE-077E-9625-06B4-9651D62FF2D9}"/>
+              </a:ext>
+            </a:extLst>
+          </p:cNvPr>
+          <p:cNvSpPr txBox="1"/>
+          <p:nvPr/>
+        </p:nvSpPr>
+        <p:spPr>
+          <a:xfrm>
+            <a:off x="6230029" y="6512590"/>
+            <a:ext cx="418704" cy="261610"/>
+          </a:xfrm>
+          <a:prstGeom prst="rect">
+            <a:avLst/>
+          </a:prstGeom>
+          <a:noFill/>
+        </p:spPr>
+        <p:txBody>
+          <a:bodyPr wrap="none" rtlCol="0">
+            <a:spAutoFit/>
+          </a:bodyPr>
+          <a:lstStyle/>
+          <a:p>
+            <a:r>
+              <a:rPr lang="en-US" sz="1100" i="1" dirty="0"/>
+              <a:t>P25</a:t>
+            </a:r>
+          </a:p>
+        </p:txBody>
+      </p:sp>
+      <p:sp>
+        <p:nvSpPr>
+          <p:cNvPr id="50" name="Rectangle 49">
+            <a:extLst>
+              <a:ext uri="{FF2B5EF4-FFF2-40B4-BE49-F238E27FC236}">
+                <a16:creationId xmlns:a16="http://schemas.microsoft.com/office/drawing/2014/main" id="{EBCF432B-4D27-936C-0837-A35E38AC73E4}"/>
+              </a:ext>
+            </a:extLst>
+          </p:cNvPr>
+          <p:cNvSpPr/>
+          <p:nvPr/>
+        </p:nvSpPr>
+        <p:spPr>
+          <a:xfrm>
+            <a:off x="3599876" y="3713931"/>
+            <a:ext cx="45719" cy="2872758"/>
+          </a:xfrm>
+          <a:prstGeom prst="rect">
+            <a:avLst/>
+          </a:prstGeom>
+          <a:noFill/>
+          <a:ln>
+            <a:solidFill>
+              <a:schemeClr val="bg1"/>
+            </a:solidFill>
+          </a:ln>
+        </p:spPr>
+        <p:style>
+          <a:lnRef idx="2">
+            <a:schemeClr val="accent2"/>
+          </a:lnRef>
+          <a:fillRef idx="1">
+            <a:schemeClr val="lt1"/>
+          </a:fillRef>
+          <a:effectRef idx="0">
+            <a:schemeClr val="accent2"/>
+          </a:effectRef>
+          <a:fontRef idx="minor">
+            <a:schemeClr val="dk1"/>
+          </a:fontRef>
+        </p:style>
+        <p:txBody>
+          <a:bodyPr rtlCol="0" anchor="ctr"/>
+          <a:lstStyle/>
+          <a:p>
+            <a:pPr algn="ctr"/>
+            <a:endParaRPr lang="en-US" dirty="0"/>
+          </a:p>
+          <a:p>
+            <a:pPr algn="ctr"/>
+            <a:endParaRPr lang="en-US" dirty="0"/>
+          </a:p>
+        </p:txBody>
+      </p:sp>
+      <p:sp>
+        <p:nvSpPr>
+          <p:cNvPr id="51" name="TextBox 50">
+            <a:extLst>
+              <a:ext uri="{FF2B5EF4-FFF2-40B4-BE49-F238E27FC236}">
+                <a16:creationId xmlns:a16="http://schemas.microsoft.com/office/drawing/2014/main" id="{EF6222E3-07B8-4476-4C09-3B977567D417}"/>
+              </a:ext>
+            </a:extLst>
+          </p:cNvPr>
+          <p:cNvSpPr txBox="1"/>
+          <p:nvPr/>
+        </p:nvSpPr>
+        <p:spPr>
+          <a:xfrm>
+            <a:off x="3413383" y="6489147"/>
+            <a:ext cx="418704" cy="261610"/>
+          </a:xfrm>
+          <a:prstGeom prst="rect">
+            <a:avLst/>
+          </a:prstGeom>
+          <a:noFill/>
+        </p:spPr>
+        <p:txBody>
+          <a:bodyPr wrap="none" rtlCol="0">
+            <a:spAutoFit/>
+          </a:bodyPr>
+          <a:lstStyle/>
+          <a:p>
+            <a:r>
+              <a:rPr lang="en-US" sz="1100" i="1" dirty="0"/>
+              <a:t>P75</a:t>
+            </a:r>
+          </a:p>
+        </p:txBody>
+      </p:sp>
     </p:spTree>
     <p:extLst>
       <p:ext uri="{BB962C8B-B14F-4D97-AF65-F5344CB8AC3E}">

--- a/figures/figures.pptx
+++ b/figures/figures.pptx
@@ -11,6 +11,7 @@
     <p:sldId id="266" r:id="rId5"/>
     <p:sldId id="269" r:id="rId6"/>
     <p:sldId id="268" r:id="rId7"/>
+    <p:sldId id="270" r:id="rId8"/>
   </p:sldIdLst>
   <p:sldSz cx="12192000" cy="6858000"/>
   <p:notesSz cx="6858000" cy="9144000"/>
@@ -9924,6 +9925,238 @@
 </p:sld>
 </file>
 
+<file path=ppt/slides/slide7.xml><?xml version="1.0" encoding="utf-8"?>
+<p:sld xmlns:a="http://schemas.openxmlformats.org/drawingml/2006/main" xmlns:r="http://schemas.openxmlformats.org/officeDocument/2006/relationships" xmlns:p="http://schemas.openxmlformats.org/presentationml/2006/main">
+  <p:cSld>
+    <p:spTree>
+      <p:nvGrpSpPr>
+        <p:cNvPr id="1" name=""/>
+        <p:cNvGrpSpPr/>
+        <p:nvPr/>
+      </p:nvGrpSpPr>
+      <p:grpSpPr>
+        <a:xfrm>
+          <a:off x="0" y="0"/>
+          <a:ext cx="0" cy="0"/>
+          <a:chOff x="0" y="0"/>
+          <a:chExt cx="0" cy="0"/>
+        </a:xfrm>
+      </p:grpSpPr>
+      <p:pic>
+        <p:nvPicPr>
+          <p:cNvPr id="11" name="Picture 10">
+            <a:extLst>
+              <a:ext uri="{FF2B5EF4-FFF2-40B4-BE49-F238E27FC236}">
+                <a16:creationId xmlns:a16="http://schemas.microsoft.com/office/drawing/2014/main" id="{FED8DAA8-D68D-BED5-7B0A-67B3D0363FF2}"/>
+              </a:ext>
+            </a:extLst>
+          </p:cNvPr>
+          <p:cNvPicPr>
+            <a:picLocks noChangeAspect="1"/>
+          </p:cNvPicPr>
+          <p:nvPr/>
+        </p:nvPicPr>
+        <p:blipFill>
+          <a:blip r:embed="rId2"/>
+          <a:stretch>
+            <a:fillRect/>
+          </a:stretch>
+        </p:blipFill>
+        <p:spPr>
+          <a:xfrm>
+            <a:off x="2529169" y="1055451"/>
+            <a:ext cx="6972300" cy="4673600"/>
+          </a:xfrm>
+          <a:prstGeom prst="rect">
+            <a:avLst/>
+          </a:prstGeom>
+        </p:spPr>
+      </p:pic>
+      <p:sp>
+        <p:nvSpPr>
+          <p:cNvPr id="6" name="TextBox 5">
+            <a:extLst>
+              <a:ext uri="{FF2B5EF4-FFF2-40B4-BE49-F238E27FC236}">
+                <a16:creationId xmlns:a16="http://schemas.microsoft.com/office/drawing/2014/main" id="{189D26E9-2E4A-CD93-F4AF-15BB9CD2C711}"/>
+              </a:ext>
+            </a:extLst>
+          </p:cNvPr>
+          <p:cNvSpPr txBox="1"/>
+          <p:nvPr/>
+        </p:nvSpPr>
+        <p:spPr>
+          <a:xfrm>
+            <a:off x="2662520" y="907534"/>
+            <a:ext cx="484094" cy="338554"/>
+          </a:xfrm>
+          <a:prstGeom prst="rect">
+            <a:avLst/>
+          </a:prstGeom>
+          <a:noFill/>
+        </p:spPr>
+        <p:txBody>
+          <a:bodyPr wrap="square" rtlCol="0">
+            <a:spAutoFit/>
+          </a:bodyPr>
+          <a:lstStyle/>
+          <a:p>
+            <a:r>
+              <a:rPr lang="en-US" sz="1600" dirty="0"/>
+              <a:t>a)</a:t>
+            </a:r>
+          </a:p>
+        </p:txBody>
+      </p:sp>
+      <p:sp>
+        <p:nvSpPr>
+          <p:cNvPr id="7" name="TextBox 6">
+            <a:extLst>
+              <a:ext uri="{FF2B5EF4-FFF2-40B4-BE49-F238E27FC236}">
+                <a16:creationId xmlns:a16="http://schemas.microsoft.com/office/drawing/2014/main" id="{465E3ABF-F07F-AFEB-0BE9-0CA32E0238F0}"/>
+              </a:ext>
+            </a:extLst>
+          </p:cNvPr>
+          <p:cNvSpPr txBox="1"/>
+          <p:nvPr/>
+        </p:nvSpPr>
+        <p:spPr>
+          <a:xfrm>
+            <a:off x="5449983" y="907534"/>
+            <a:ext cx="484094" cy="338554"/>
+          </a:xfrm>
+          <a:prstGeom prst="rect">
+            <a:avLst/>
+          </a:prstGeom>
+          <a:noFill/>
+        </p:spPr>
+        <p:txBody>
+          <a:bodyPr wrap="square" rtlCol="0">
+            <a:spAutoFit/>
+          </a:bodyPr>
+          <a:lstStyle/>
+          <a:p>
+            <a:r>
+              <a:rPr lang="en-US" sz="1600" dirty="0"/>
+              <a:t>b)</a:t>
+            </a:r>
+          </a:p>
+        </p:txBody>
+      </p:sp>
+      <p:sp>
+        <p:nvSpPr>
+          <p:cNvPr id="8" name="TextBox 7">
+            <a:extLst>
+              <a:ext uri="{FF2B5EF4-FFF2-40B4-BE49-F238E27FC236}">
+                <a16:creationId xmlns:a16="http://schemas.microsoft.com/office/drawing/2014/main" id="{F2176287-B47D-E6D0-46EE-A262F3573726}"/>
+              </a:ext>
+            </a:extLst>
+          </p:cNvPr>
+          <p:cNvSpPr txBox="1"/>
+          <p:nvPr/>
+        </p:nvSpPr>
+        <p:spPr>
+          <a:xfrm>
+            <a:off x="2635626" y="3296326"/>
+            <a:ext cx="484094" cy="338554"/>
+          </a:xfrm>
+          <a:prstGeom prst="rect">
+            <a:avLst/>
+          </a:prstGeom>
+          <a:noFill/>
+        </p:spPr>
+        <p:txBody>
+          <a:bodyPr wrap="square" rtlCol="0">
+            <a:spAutoFit/>
+          </a:bodyPr>
+          <a:lstStyle/>
+          <a:p>
+            <a:r>
+              <a:rPr lang="en-US" sz="1600" dirty="0"/>
+              <a:t>c)</a:t>
+            </a:r>
+          </a:p>
+        </p:txBody>
+      </p:sp>
+      <p:sp>
+        <p:nvSpPr>
+          <p:cNvPr id="9" name="TextBox 8">
+            <a:extLst>
+              <a:ext uri="{FF2B5EF4-FFF2-40B4-BE49-F238E27FC236}">
+                <a16:creationId xmlns:a16="http://schemas.microsoft.com/office/drawing/2014/main" id="{859B76DB-2B1B-FBE0-87A2-A13B06AFC064}"/>
+              </a:ext>
+            </a:extLst>
+          </p:cNvPr>
+          <p:cNvSpPr txBox="1"/>
+          <p:nvPr/>
+        </p:nvSpPr>
+        <p:spPr>
+          <a:xfrm>
+            <a:off x="5423649" y="3296326"/>
+            <a:ext cx="484094" cy="338554"/>
+          </a:xfrm>
+          <a:prstGeom prst="rect">
+            <a:avLst/>
+          </a:prstGeom>
+          <a:noFill/>
+        </p:spPr>
+        <p:txBody>
+          <a:bodyPr wrap="square" rtlCol="0">
+            <a:spAutoFit/>
+          </a:bodyPr>
+          <a:lstStyle/>
+          <a:p>
+            <a:r>
+              <a:rPr lang="en-US" sz="1600" dirty="0"/>
+              <a:t>d)</a:t>
+            </a:r>
+          </a:p>
+        </p:txBody>
+      </p:sp>
+      <p:sp>
+        <p:nvSpPr>
+          <p:cNvPr id="12" name="TextBox 11">
+            <a:extLst>
+              <a:ext uri="{FF2B5EF4-FFF2-40B4-BE49-F238E27FC236}">
+                <a16:creationId xmlns:a16="http://schemas.microsoft.com/office/drawing/2014/main" id="{41FC3D2A-DF4F-DB7A-8DE5-FCB5A316A3E2}"/>
+              </a:ext>
+            </a:extLst>
+          </p:cNvPr>
+          <p:cNvSpPr txBox="1"/>
+          <p:nvPr/>
+        </p:nvSpPr>
+        <p:spPr>
+          <a:xfrm>
+            <a:off x="11430000" y="2864224"/>
+            <a:ext cx="184731" cy="369332"/>
+          </a:xfrm>
+          <a:prstGeom prst="rect">
+            <a:avLst/>
+          </a:prstGeom>
+          <a:noFill/>
+        </p:spPr>
+        <p:txBody>
+          <a:bodyPr wrap="none" rtlCol="0">
+            <a:spAutoFit/>
+          </a:bodyPr>
+          <a:lstStyle/>
+          <a:p>
+            <a:endParaRPr lang="en-US"/>
+          </a:p>
+        </p:txBody>
+      </p:sp>
+    </p:spTree>
+    <p:extLst>
+      <p:ext uri="{BB962C8B-B14F-4D97-AF65-F5344CB8AC3E}">
+        <p14:creationId xmlns:p14="http://schemas.microsoft.com/office/powerpoint/2010/main" val="1815007270"/>
+      </p:ext>
+    </p:extLst>
+  </p:cSld>
+  <p:clrMapOvr>
+    <a:masterClrMapping/>
+  </p:clrMapOvr>
+</p:sld>
+</file>
+
 <file path=ppt/theme/theme1.xml><?xml version="1.0" encoding="utf-8"?>
 <a:theme xmlns:a="http://schemas.openxmlformats.org/drawingml/2006/main" name="Office Theme">
   <a:themeElements>

--- a/figures/figures.pptx
+++ b/figures/figures.pptx
@@ -265,7 +265,7 @@
           <a:p>
             <a:fld id="{75A9CF98-CC55-774D-9AE2-4D7D2CE05F38}" type="datetimeFigureOut">
               <a:rPr lang="en-US" smtClean="0"/>
-              <a:t>2/17/26</a:t>
+              <a:t>4/10/26</a:t>
             </a:fld>
             <a:endParaRPr lang="en-US"/>
           </a:p>
@@ -463,7 +463,7 @@
           <a:p>
             <a:fld id="{75A9CF98-CC55-774D-9AE2-4D7D2CE05F38}" type="datetimeFigureOut">
               <a:rPr lang="en-US" smtClean="0"/>
-              <a:t>2/17/26</a:t>
+              <a:t>4/10/26</a:t>
             </a:fld>
             <a:endParaRPr lang="en-US"/>
           </a:p>
@@ -671,7 +671,7 @@
           <a:p>
             <a:fld id="{75A9CF98-CC55-774D-9AE2-4D7D2CE05F38}" type="datetimeFigureOut">
               <a:rPr lang="en-US" smtClean="0"/>
-              <a:t>2/17/26</a:t>
+              <a:t>4/10/26</a:t>
             </a:fld>
             <a:endParaRPr lang="en-US"/>
           </a:p>
@@ -869,7 +869,7 @@
           <a:p>
             <a:fld id="{75A9CF98-CC55-774D-9AE2-4D7D2CE05F38}" type="datetimeFigureOut">
               <a:rPr lang="en-US" smtClean="0"/>
-              <a:t>2/17/26</a:t>
+              <a:t>4/10/26</a:t>
             </a:fld>
             <a:endParaRPr lang="en-US"/>
           </a:p>
@@ -1144,7 +1144,7 @@
           <a:p>
             <a:fld id="{75A9CF98-CC55-774D-9AE2-4D7D2CE05F38}" type="datetimeFigureOut">
               <a:rPr lang="en-US" smtClean="0"/>
-              <a:t>2/17/26</a:t>
+              <a:t>4/10/26</a:t>
             </a:fld>
             <a:endParaRPr lang="en-US"/>
           </a:p>
@@ -1409,7 +1409,7 @@
           <a:p>
             <a:fld id="{75A9CF98-CC55-774D-9AE2-4D7D2CE05F38}" type="datetimeFigureOut">
               <a:rPr lang="en-US" smtClean="0"/>
-              <a:t>2/17/26</a:t>
+              <a:t>4/10/26</a:t>
             </a:fld>
             <a:endParaRPr lang="en-US"/>
           </a:p>
@@ -1821,7 +1821,7 @@
           <a:p>
             <a:fld id="{75A9CF98-CC55-774D-9AE2-4D7D2CE05F38}" type="datetimeFigureOut">
               <a:rPr lang="en-US" smtClean="0"/>
-              <a:t>2/17/26</a:t>
+              <a:t>4/10/26</a:t>
             </a:fld>
             <a:endParaRPr lang="en-US"/>
           </a:p>
@@ -1962,7 +1962,7 @@
           <a:p>
             <a:fld id="{75A9CF98-CC55-774D-9AE2-4D7D2CE05F38}" type="datetimeFigureOut">
               <a:rPr lang="en-US" smtClean="0"/>
-              <a:t>2/17/26</a:t>
+              <a:t>4/10/26</a:t>
             </a:fld>
             <a:endParaRPr lang="en-US"/>
           </a:p>
@@ -2075,7 +2075,7 @@
           <a:p>
             <a:fld id="{75A9CF98-CC55-774D-9AE2-4D7D2CE05F38}" type="datetimeFigureOut">
               <a:rPr lang="en-US" smtClean="0"/>
-              <a:t>2/17/26</a:t>
+              <a:t>4/10/26</a:t>
             </a:fld>
             <a:endParaRPr lang="en-US"/>
           </a:p>
@@ -2386,7 +2386,7 @@
           <a:p>
             <a:fld id="{75A9CF98-CC55-774D-9AE2-4D7D2CE05F38}" type="datetimeFigureOut">
               <a:rPr lang="en-US" smtClean="0"/>
-              <a:t>2/17/26</a:t>
+              <a:t>4/10/26</a:t>
             </a:fld>
             <a:endParaRPr lang="en-US"/>
           </a:p>
@@ -2674,7 +2674,7 @@
           <a:p>
             <a:fld id="{75A9CF98-CC55-774D-9AE2-4D7D2CE05F38}" type="datetimeFigureOut">
               <a:rPr lang="en-US" smtClean="0"/>
-              <a:t>2/17/26</a:t>
+              <a:t>4/10/26</a:t>
             </a:fld>
             <a:endParaRPr lang="en-US"/>
           </a:p>
@@ -2915,7 +2915,7 @@
           <a:p>
             <a:fld id="{75A9CF98-CC55-774D-9AE2-4D7D2CE05F38}" type="datetimeFigureOut">
               <a:rPr lang="en-US" smtClean="0"/>
-              <a:t>2/17/26</a:t>
+              <a:t>4/10/26</a:t>
             </a:fld>
             <a:endParaRPr lang="en-US"/>
           </a:p>
@@ -7986,10 +7986,10 @@
       </p:grpSpPr>
       <p:pic>
         <p:nvPicPr>
-          <p:cNvPr id="3" name="Picture 2">
-            <a:extLst>
-              <a:ext uri="{FF2B5EF4-FFF2-40B4-BE49-F238E27FC236}">
-                <a16:creationId xmlns:a16="http://schemas.microsoft.com/office/drawing/2014/main" id="{82EE29B0-0D1B-DD6B-BCBE-06358188E22F}"/>
+          <p:cNvPr id="7" name="Picture 6">
+            <a:extLst>
+              <a:ext uri="{FF2B5EF4-FFF2-40B4-BE49-F238E27FC236}">
+                <a16:creationId xmlns:a16="http://schemas.microsoft.com/office/drawing/2014/main" id="{04CC8979-02D7-8C76-6231-18F3456D8EB6}"/>
               </a:ext>
             </a:extLst>
           </p:cNvPr>
@@ -8000,14 +8000,15 @@
         </p:nvPicPr>
         <p:blipFill>
           <a:blip r:embed="rId2"/>
+          <a:srcRect t="23070" r="23981" b="15677"/>
           <a:stretch>
             <a:fillRect/>
           </a:stretch>
         </p:blipFill>
         <p:spPr>
           <a:xfrm>
-            <a:off x="6891762" y="1690897"/>
-            <a:ext cx="5300238" cy="3978053"/>
+            <a:off x="3619420" y="2577606"/>
+            <a:ext cx="3816853" cy="2778601"/>
           </a:xfrm>
           <a:prstGeom prst="rect">
             <a:avLst/>
@@ -8016,10 +8017,10 @@
       </p:pic>
       <p:pic>
         <p:nvPicPr>
-          <p:cNvPr id="4" name="Picture 3">
-            <a:extLst>
-              <a:ext uri="{FF2B5EF4-FFF2-40B4-BE49-F238E27FC236}">
-                <a16:creationId xmlns:a16="http://schemas.microsoft.com/office/drawing/2014/main" id="{B2E06A5C-8DD2-9C99-A6C1-E3C1B6BC8703}"/>
+          <p:cNvPr id="11" name="Picture 10">
+            <a:extLst>
+              <a:ext uri="{FF2B5EF4-FFF2-40B4-BE49-F238E27FC236}">
+                <a16:creationId xmlns:a16="http://schemas.microsoft.com/office/drawing/2014/main" id="{E71FEB8C-0E9F-20A2-AFB0-44E47F193F71}"/>
               </a:ext>
             </a:extLst>
           </p:cNvPr>
@@ -8030,27 +8031,191 @@
         </p:nvPicPr>
         <p:blipFill>
           <a:blip r:embed="rId3"/>
-          <a:srcRect r="18824"/>
           <a:stretch>
             <a:fillRect/>
           </a:stretch>
         </p:blipFill>
         <p:spPr>
           <a:xfrm>
-            <a:off x="-994" y="1983522"/>
-            <a:ext cx="3746004" cy="3463508"/>
+            <a:off x="7321280" y="1739900"/>
+            <a:ext cx="4680999" cy="4229099"/>
           </a:xfrm>
           <a:prstGeom prst="rect">
             <a:avLst/>
           </a:prstGeom>
         </p:spPr>
       </p:pic>
+      <p:sp>
+        <p:nvSpPr>
+          <p:cNvPr id="18" name="TextBox 17">
+            <a:extLst>
+              <a:ext uri="{FF2B5EF4-FFF2-40B4-BE49-F238E27FC236}">
+                <a16:creationId xmlns:a16="http://schemas.microsoft.com/office/drawing/2014/main" id="{D826E07D-A6DA-40ED-F1D5-A488DAFA13CE}"/>
+              </a:ext>
+            </a:extLst>
+          </p:cNvPr>
+          <p:cNvSpPr txBox="1"/>
+          <p:nvPr/>
+        </p:nvSpPr>
+        <p:spPr>
+          <a:xfrm>
+            <a:off x="364714" y="2135085"/>
+            <a:ext cx="2259479" cy="338554"/>
+          </a:xfrm>
+          <a:prstGeom prst="rect">
+            <a:avLst/>
+          </a:prstGeom>
+          <a:noFill/>
+        </p:spPr>
+        <p:txBody>
+          <a:bodyPr wrap="square" rtlCol="0">
+            <a:spAutoFit/>
+          </a:bodyPr>
+          <a:lstStyle/>
+          <a:p>
+            <a:r>
+              <a:rPr lang="en-US" sz="1600" b="1" dirty="0">
+                <a:latin typeface="Aptos" panose="020B0004020202020204" pitchFamily="34" charset="0"/>
+              </a:rPr>
+              <a:t>a)</a:t>
+            </a:r>
+            <a:r>
+              <a:rPr lang="en-US" sz="1600" b="1" dirty="0">
+                <a:solidFill>
+                  <a:schemeClr val="tx1"/>
+                </a:solidFill>
+                <a:latin typeface="Aptos" panose="020B0004020202020204" pitchFamily="34" charset="0"/>
+              </a:rPr>
+              <a:t> </a:t>
+            </a:r>
+            <a:r>
+              <a:rPr lang="en-US" sz="1600" dirty="0">
+                <a:solidFill>
+                  <a:schemeClr val="tx1"/>
+                </a:solidFill>
+                <a:latin typeface="Aptos" panose="020B0004020202020204" pitchFamily="34" charset="0"/>
+              </a:rPr>
+              <a:t>SINDy</a:t>
+            </a:r>
+          </a:p>
+        </p:txBody>
+      </p:sp>
+      <p:sp>
+        <p:nvSpPr>
+          <p:cNvPr id="19" name="TextBox 18">
+            <a:extLst>
+              <a:ext uri="{FF2B5EF4-FFF2-40B4-BE49-F238E27FC236}">
+                <a16:creationId xmlns:a16="http://schemas.microsoft.com/office/drawing/2014/main" id="{E9548505-F0F3-312D-F32C-413928F824FB}"/>
+              </a:ext>
+            </a:extLst>
+          </p:cNvPr>
+          <p:cNvSpPr txBox="1"/>
+          <p:nvPr/>
+        </p:nvSpPr>
+        <p:spPr>
+          <a:xfrm>
+            <a:off x="3717303" y="2135085"/>
+            <a:ext cx="2259479" cy="338554"/>
+          </a:xfrm>
+          <a:prstGeom prst="rect">
+            <a:avLst/>
+          </a:prstGeom>
+          <a:noFill/>
+        </p:spPr>
+        <p:txBody>
+          <a:bodyPr wrap="square" rtlCol="0">
+            <a:spAutoFit/>
+          </a:bodyPr>
+          <a:lstStyle/>
+          <a:p>
+            <a:r>
+              <a:rPr lang="en-US" sz="1600" b="1" dirty="0">
+                <a:latin typeface="Aptos" panose="020B0004020202020204" pitchFamily="34" charset="0"/>
+              </a:rPr>
+              <a:t>b)</a:t>
+            </a:r>
+            <a:r>
+              <a:rPr lang="en-US" sz="1600" b="1" dirty="0">
+                <a:solidFill>
+                  <a:schemeClr val="tx1"/>
+                </a:solidFill>
+                <a:latin typeface="Aptos" panose="020B0004020202020204" pitchFamily="34" charset="0"/>
+              </a:rPr>
+              <a:t> </a:t>
+            </a:r>
+            <a:r>
+              <a:rPr lang="en-US" sz="1600" dirty="0">
+                <a:solidFill>
+                  <a:schemeClr val="tx1"/>
+                </a:solidFill>
+                <a:latin typeface="Aptos" panose="020B0004020202020204" pitchFamily="34" charset="0"/>
+              </a:rPr>
+              <a:t>NN-derivative</a:t>
+            </a:r>
+          </a:p>
+        </p:txBody>
+      </p:sp>
+      <p:sp>
+        <p:nvSpPr>
+          <p:cNvPr id="20" name="TextBox 19">
+            <a:extLst>
+              <a:ext uri="{FF2B5EF4-FFF2-40B4-BE49-F238E27FC236}">
+                <a16:creationId xmlns:a16="http://schemas.microsoft.com/office/drawing/2014/main" id="{3F8275C6-77D0-1357-A7B7-C805BB20D113}"/>
+              </a:ext>
+            </a:extLst>
+          </p:cNvPr>
+          <p:cNvSpPr txBox="1"/>
+          <p:nvPr/>
+        </p:nvSpPr>
+        <p:spPr>
+          <a:xfrm>
+            <a:off x="7321280" y="2146290"/>
+            <a:ext cx="2458150" cy="338554"/>
+          </a:xfrm>
+          <a:prstGeom prst="rect">
+            <a:avLst/>
+          </a:prstGeom>
+          <a:noFill/>
+        </p:spPr>
+        <p:txBody>
+          <a:bodyPr wrap="square" rtlCol="0">
+            <a:spAutoFit/>
+          </a:bodyPr>
+          <a:lstStyle/>
+          <a:p>
+            <a:r>
+              <a:rPr lang="en-US" sz="1600" b="1" dirty="0">
+                <a:latin typeface="Aptos" panose="020B0004020202020204" pitchFamily="34" charset="0"/>
+              </a:rPr>
+              <a:t>c)</a:t>
+            </a:r>
+            <a:r>
+              <a:rPr lang="en-US" sz="1600" b="1" dirty="0">
+                <a:solidFill>
+                  <a:schemeClr val="tx1"/>
+                </a:solidFill>
+                <a:latin typeface="Aptos" panose="020B0004020202020204" pitchFamily="34" charset="0"/>
+              </a:rPr>
+              <a:t> </a:t>
+            </a:r>
+            <a:r>
+              <a:rPr lang="en-US" sz="1600" dirty="0">
+                <a:solidFill>
+                  <a:schemeClr val="tx1"/>
+                </a:solidFill>
+                <a:latin typeface="Aptos" panose="020B0004020202020204" pitchFamily="34" charset="0"/>
+              </a:rPr>
+              <a:t>Autoregressive (AR)</a:t>
+            </a:r>
+          </a:p>
+        </p:txBody>
+      </p:sp>
       <p:pic>
         <p:nvPicPr>
-          <p:cNvPr id="15" name="Picture 14">
-            <a:extLst>
-              <a:ext uri="{FF2B5EF4-FFF2-40B4-BE49-F238E27FC236}">
-                <a16:creationId xmlns:a16="http://schemas.microsoft.com/office/drawing/2014/main" id="{4422557D-440D-7C4A-127F-99CF8FA8CB29}"/>
+          <p:cNvPr id="5" name="Picture 4">
+            <a:extLst>
+              <a:ext uri="{FF2B5EF4-FFF2-40B4-BE49-F238E27FC236}">
+                <a16:creationId xmlns:a16="http://schemas.microsoft.com/office/drawing/2014/main" id="{FB98A56D-D2A8-16D8-1E6B-BF9E1ABE8075}"/>
               </a:ext>
             </a:extLst>
           </p:cNvPr>
@@ -8061,162 +8226,21 @@
         </p:nvPicPr>
         <p:blipFill>
           <a:blip r:embed="rId4"/>
-          <a:srcRect l="2193" r="24776"/>
+          <a:srcRect l="91" t="16844" r="26322" b="8467"/>
           <a:stretch>
             <a:fillRect/>
           </a:stretch>
         </p:blipFill>
         <p:spPr>
           <a:xfrm>
-            <a:off x="3745010" y="1842268"/>
-            <a:ext cx="3576270" cy="3675313"/>
+            <a:off x="237246" y="2416234"/>
+            <a:ext cx="3382174" cy="3101347"/>
           </a:xfrm>
           <a:prstGeom prst="rect">
             <a:avLst/>
           </a:prstGeom>
         </p:spPr>
       </p:pic>
-      <p:sp>
-        <p:nvSpPr>
-          <p:cNvPr id="18" name="TextBox 17">
-            <a:extLst>
-              <a:ext uri="{FF2B5EF4-FFF2-40B4-BE49-F238E27FC236}">
-                <a16:creationId xmlns:a16="http://schemas.microsoft.com/office/drawing/2014/main" id="{D826E07D-A6DA-40ED-F1D5-A488DAFA13CE}"/>
-              </a:ext>
-            </a:extLst>
-          </p:cNvPr>
-          <p:cNvSpPr txBox="1"/>
-          <p:nvPr/>
-        </p:nvSpPr>
-        <p:spPr>
-          <a:xfrm>
-            <a:off x="-233953" y="1983522"/>
-            <a:ext cx="2259479" cy="369332"/>
-          </a:xfrm>
-          <a:prstGeom prst="rect">
-            <a:avLst/>
-          </a:prstGeom>
-          <a:noFill/>
-        </p:spPr>
-        <p:txBody>
-          <a:bodyPr wrap="square" rtlCol="0">
-            <a:spAutoFit/>
-          </a:bodyPr>
-          <a:lstStyle/>
-          <a:p>
-            <a:pPr algn="ctr"/>
-            <a:r>
-              <a:rPr lang="en-US" b="1" dirty="0">
-                <a:latin typeface="Aptos" panose="020B0004020202020204" pitchFamily="34" charset="0"/>
-              </a:rPr>
-              <a:t>a)</a:t>
-            </a:r>
-            <a:r>
-              <a:rPr lang="en-US" b="1" dirty="0">
-                <a:solidFill>
-                  <a:schemeClr val="tx1"/>
-                </a:solidFill>
-                <a:latin typeface="Aptos" panose="020B0004020202020204" pitchFamily="34" charset="0"/>
-              </a:rPr>
-              <a:t> SINDy</a:t>
-            </a:r>
-          </a:p>
-        </p:txBody>
-      </p:sp>
-      <p:sp>
-        <p:nvSpPr>
-          <p:cNvPr id="19" name="TextBox 18">
-            <a:extLst>
-              <a:ext uri="{FF2B5EF4-FFF2-40B4-BE49-F238E27FC236}">
-                <a16:creationId xmlns:a16="http://schemas.microsoft.com/office/drawing/2014/main" id="{E9548505-F0F3-312D-F32C-413928F824FB}"/>
-              </a:ext>
-            </a:extLst>
-          </p:cNvPr>
-          <p:cNvSpPr txBox="1"/>
-          <p:nvPr/>
-        </p:nvSpPr>
-        <p:spPr>
-          <a:xfrm>
-            <a:off x="3717303" y="1944585"/>
-            <a:ext cx="2259479" cy="369332"/>
-          </a:xfrm>
-          <a:prstGeom prst="rect">
-            <a:avLst/>
-          </a:prstGeom>
-          <a:noFill/>
-        </p:spPr>
-        <p:txBody>
-          <a:bodyPr wrap="square" rtlCol="0">
-            <a:spAutoFit/>
-          </a:bodyPr>
-          <a:lstStyle/>
-          <a:p>
-            <a:pPr algn="ctr"/>
-            <a:r>
-              <a:rPr lang="en-US" b="1" dirty="0">
-                <a:latin typeface="Aptos" panose="020B0004020202020204" pitchFamily="34" charset="0"/>
-              </a:rPr>
-              <a:t>b)</a:t>
-            </a:r>
-            <a:r>
-              <a:rPr lang="en-US" b="1" dirty="0">
-                <a:solidFill>
-                  <a:schemeClr val="tx1"/>
-                </a:solidFill>
-                <a:latin typeface="Aptos" panose="020B0004020202020204" pitchFamily="34" charset="0"/>
-              </a:rPr>
-              <a:t> NN-derivative</a:t>
-            </a:r>
-          </a:p>
-        </p:txBody>
-      </p:sp>
-      <p:sp>
-        <p:nvSpPr>
-          <p:cNvPr id="20" name="TextBox 19">
-            <a:extLst>
-              <a:ext uri="{FF2B5EF4-FFF2-40B4-BE49-F238E27FC236}">
-                <a16:creationId xmlns:a16="http://schemas.microsoft.com/office/drawing/2014/main" id="{3F8275C6-77D0-1357-A7B7-C805BB20D113}"/>
-              </a:ext>
-            </a:extLst>
-          </p:cNvPr>
-          <p:cNvSpPr txBox="1"/>
-          <p:nvPr/>
-        </p:nvSpPr>
-        <p:spPr>
-          <a:xfrm>
-            <a:off x="7321280" y="1955790"/>
-            <a:ext cx="2458150" cy="369332"/>
-          </a:xfrm>
-          <a:prstGeom prst="rect">
-            <a:avLst/>
-          </a:prstGeom>
-          <a:noFill/>
-        </p:spPr>
-        <p:txBody>
-          <a:bodyPr wrap="square" rtlCol="0">
-            <a:spAutoFit/>
-          </a:bodyPr>
-          <a:lstStyle/>
-          <a:p>
-            <a:pPr algn="ctr"/>
-            <a:r>
-              <a:rPr lang="en-US" b="1" dirty="0">
-                <a:latin typeface="Aptos" panose="020B0004020202020204" pitchFamily="34" charset="0"/>
-              </a:rPr>
-              <a:t>c)</a:t>
-            </a:r>
-            <a:r>
-              <a:rPr lang="en-US" b="1" dirty="0">
-                <a:solidFill>
-                  <a:schemeClr val="tx1"/>
-                </a:solidFill>
-                <a:latin typeface="Aptos" panose="020B0004020202020204" pitchFamily="34" charset="0"/>
-              </a:rPr>
-              <a:t> Autoregressive (AR)</a:t>
-            </a:r>
-          </a:p>
-        </p:txBody>
-      </p:sp>
     </p:spTree>
     <p:extLst>
       <p:ext uri="{BB962C8B-B14F-4D97-AF65-F5344CB8AC3E}">
@@ -8249,10 +8273,10 @@
       </p:grpSpPr>
       <p:pic>
         <p:nvPicPr>
-          <p:cNvPr id="40" name="Picture 39">
-            <a:extLst>
-              <a:ext uri="{FF2B5EF4-FFF2-40B4-BE49-F238E27FC236}">
-                <a16:creationId xmlns:a16="http://schemas.microsoft.com/office/drawing/2014/main" id="{A43143B8-00B7-0DF4-24A4-BEC61634C8AD}"/>
+          <p:cNvPr id="5" name="Picture 4">
+            <a:extLst>
+              <a:ext uri="{FF2B5EF4-FFF2-40B4-BE49-F238E27FC236}">
+                <a16:creationId xmlns:a16="http://schemas.microsoft.com/office/drawing/2014/main" id="{E199FE25-52FC-9C04-F12C-74CAF49B667D}"/>
               </a:ext>
             </a:extLst>
           </p:cNvPr>
@@ -8269,8 +8293,8 @@
         </p:blipFill>
         <p:spPr>
           <a:xfrm>
-            <a:off x="1352108" y="29469"/>
-            <a:ext cx="6806986" cy="3025327"/>
+            <a:off x="1394809" y="55805"/>
+            <a:ext cx="6721583" cy="2987370"/>
           </a:xfrm>
           <a:prstGeom prst="rect">
             <a:avLst/>
@@ -9154,10 +9178,10 @@
       </p:grpSpPr>
       <p:pic>
         <p:nvPicPr>
-          <p:cNvPr id="46" name="Picture 45">
-            <a:extLst>
-              <a:ext uri="{FF2B5EF4-FFF2-40B4-BE49-F238E27FC236}">
-                <a16:creationId xmlns:a16="http://schemas.microsoft.com/office/drawing/2014/main" id="{7CC86E34-4C45-09F1-0A80-C360083AF841}"/>
+          <p:cNvPr id="5" name="Picture 4">
+            <a:extLst>
+              <a:ext uri="{FF2B5EF4-FFF2-40B4-BE49-F238E27FC236}">
+                <a16:creationId xmlns:a16="http://schemas.microsoft.com/office/drawing/2014/main" id="{B508F486-B30F-0C32-97F0-DF6091A9D652}"/>
               </a:ext>
             </a:extLst>
           </p:cNvPr>
@@ -9174,8 +9198,8 @@
         </p:blipFill>
         <p:spPr>
           <a:xfrm>
-            <a:off x="1679759" y="116703"/>
-            <a:ext cx="6147506" cy="3073753"/>
+            <a:off x="1453334" y="80974"/>
+            <a:ext cx="6441109" cy="3220555"/>
           </a:xfrm>
           <a:prstGeom prst="rect">
             <a:avLst/>
@@ -9393,46 +9417,6 @@
           </a:prstGeom>
         </p:spPr>
       </p:pic>
-      <p:sp>
-        <p:nvSpPr>
-          <p:cNvPr id="31" name="TextBox 30">
-            <a:extLst>
-              <a:ext uri="{FF2B5EF4-FFF2-40B4-BE49-F238E27FC236}">
-                <a16:creationId xmlns:a16="http://schemas.microsoft.com/office/drawing/2014/main" id="{7E52A0E3-CDEA-4573-3335-AA9D6E0AC4D5}"/>
-              </a:ext>
-            </a:extLst>
-          </p:cNvPr>
-          <p:cNvSpPr txBox="1"/>
-          <p:nvPr/>
-        </p:nvSpPr>
-        <p:spPr>
-          <a:xfrm>
-            <a:off x="1456840" y="4495693"/>
-            <a:ext cx="1358839" cy="276999"/>
-          </a:xfrm>
-          <a:prstGeom prst="rect">
-            <a:avLst/>
-          </a:prstGeom>
-          <a:noFill/>
-        </p:spPr>
-        <p:txBody>
-          <a:bodyPr wrap="square" rtlCol="0">
-            <a:spAutoFit/>
-          </a:bodyPr>
-          <a:lstStyle/>
-          <a:p>
-            <a:r>
-              <a:rPr lang="en-US" sz="1200" b="1" dirty="0"/>
-              <a:t>c) </a:t>
-            </a:r>
-            <a:r>
-              <a:rPr lang="en-US" sz="1200" dirty="0"/>
-              <a:t>NN-derivative</a:t>
-            </a:r>
-            <a:endParaRPr lang="en-US" sz="1200" b="1" dirty="0"/>
-          </a:p>
-        </p:txBody>
-      </p:sp>
       <p:sp>
         <p:nvSpPr>
           <p:cNvPr id="32" name="TextBox 31">
@@ -9661,6 +9645,46 @@
           <a:p>
             <a:pPr algn="ctr"/>
             <a:endParaRPr lang="en-US" dirty="0"/>
+          </a:p>
+        </p:txBody>
+      </p:sp>
+      <p:sp>
+        <p:nvSpPr>
+          <p:cNvPr id="31" name="TextBox 30">
+            <a:extLst>
+              <a:ext uri="{FF2B5EF4-FFF2-40B4-BE49-F238E27FC236}">
+                <a16:creationId xmlns:a16="http://schemas.microsoft.com/office/drawing/2014/main" id="{7E52A0E3-CDEA-4573-3335-AA9D6E0AC4D5}"/>
+              </a:ext>
+            </a:extLst>
+          </p:cNvPr>
+          <p:cNvSpPr txBox="1"/>
+          <p:nvPr/>
+        </p:nvSpPr>
+        <p:spPr>
+          <a:xfrm>
+            <a:off x="1456840" y="4495693"/>
+            <a:ext cx="1358839" cy="276999"/>
+          </a:xfrm>
+          <a:prstGeom prst="rect">
+            <a:avLst/>
+          </a:prstGeom>
+          <a:noFill/>
+        </p:spPr>
+        <p:txBody>
+          <a:bodyPr wrap="square" rtlCol="0">
+            <a:spAutoFit/>
+          </a:bodyPr>
+          <a:lstStyle/>
+          <a:p>
+            <a:r>
+              <a:rPr lang="en-US" sz="1200" b="1" dirty="0"/>
+              <a:t>c) </a:t>
+            </a:r>
+            <a:r>
+              <a:rPr lang="en-US" sz="1200" dirty="0"/>
+              <a:t>NN-derivative</a:t>
+            </a:r>
+            <a:endParaRPr lang="en-US" sz="1200" b="1" dirty="0"/>
           </a:p>
         </p:txBody>
       </p:sp>
